--- a/plans/deck-investor.pptx
+++ b/plans/deck-investor.pptx
@@ -24,6 +24,10 @@
     <p:sldId id="272" r:id="rId23"/>
     <p:sldId id="273" r:id="rId24"/>
     <p:sldId id="274" r:id="rId25"/>
+    <p:sldId id="275" r:id="rId26"/>
+    <p:sldId id="276" r:id="rId27"/>
+    <p:sldId id="277" r:id="rId28"/>
+    <p:sldId id="278" r:id="rId29"/>
   </p:sldIdLst>
   <p:sldSz cx="12191695" cy="6858000" type="screen4x3"/>
   <p:notesSz cx="6858000" cy="9144000"/>
@@ -4033,7 +4037,7 @@
             <a:pPr/>
             <a:r>
               <a:rPr sz="1600"/>
-              <a:t>F1–F8 cognitive failure-mode taxonomy already in production use.</a:t>
+              <a:t>F1–F12 cognitive failure-mode taxonomy already in production use (extended from F1–F8 to cover JOL miscalibration, transfer failure, fluency illusion, cue-bias).</a:t>
             </a:r>
           </a:p>
           <a:p>
@@ -4121,7 +4125,7 @@
                   <a:srgbClr val="1A1A2E"/>
                 </a:solidFill>
               </a:rPr>
-              <a:t>Founder fit</a:t>
+              <a:t>Pedagogical moat — research-backed retention</a:t>
             </a:r>
           </a:p>
         </p:txBody>
@@ -4148,24 +4152,14 @@
           </a:bodyPr>
           <a:lstStyle/>
           <a:p>
-            <a:pPr/>
-            <a:r>
-              <a:rPr sz="1600"/>
-              <a:t>Senior developer (15+ years), structured-thinking-strong (ABAP background — schema and process discipline).</a:t>
-            </a:r>
-          </a:p>
-          <a:p>
-            <a:pPr/>
-            <a:r>
-              <a:rPr sz="1600"/>
-              <a:t>Building from a real artifact: a personal CCA-F study repo with mock exams, error-log analytics, and the failure-mode taxonomy that becomes the platform's moat.</a:t>
-            </a:r>
-          </a:p>
-          <a:p>
-            <a:pPr/>
-            <a:r>
-              <a:rPr sz="1600"/>
-              <a:t>Hands-on operator profile — comfortable doing all four of: write code, write content, write copy, talk to customers.</a:t>
+            <a:pPr algn="l">
+              <a:spcAft>
+                <a:spcPts val="800"/>
+              </a:spcAft>
+            </a:pPr>
+            <a:r>
+              <a:rPr sz="1800"/>
+              <a:t>The other moat: 50 years of cognitive-science evidence operationalised as product surface. Not new IP — an unowned synthesis.</a:t>
             </a:r>
           </a:p>
           <a:p>
@@ -4176,7 +4170,183 @@
             </a:pPr>
             <a:r>
               <a:rPr sz="1600"/>
-              <a:t>Day job is unrelated; this is a side bet, not a stake-everything-on-it situation. Right shape for capital-efficient validation, wrong shape for "fund-the-team-of-12."</a:t>
+              <a:t>Spacing (Cepeda et al. 2008, Psych Sci; 254-study meta in Cepeda</a:t>
+            </a:r>
+          </a:p>
+          <a:p>
+            <a:pPr algn="l">
+              <a:spcAft>
+                <a:spcPts val="800"/>
+              </a:spcAft>
+            </a:pPr>
+            <a:r>
+              <a:rPr sz="1800"/>
+              <a:t>2006): expanding-interval review → ~2× retention vs massed practice.</a:t>
+            </a:r>
+          </a:p>
+          <a:p>
+            <a:pPr>
+              <a:spcAft>
+                <a:spcPts val="600"/>
+              </a:spcAft>
+            </a:pPr>
+            <a:r>
+              <a:rPr sz="1600"/>
+              <a:t>Retrieval practice (Roediger &amp; Karpicke 2006, Psych Sci; Karpicke</a:t>
+            </a:r>
+          </a:p>
+          <a:p>
+            <a:pPr algn="l">
+              <a:spcAft>
+                <a:spcPts val="800"/>
+              </a:spcAft>
+            </a:pPr>
+            <a:r>
+              <a:rPr sz="1800"/>
+              <a:t>&amp; Blunt 2011, Science): self-testing → ~50% lift on delayed retention vs re-reading.</a:t>
+            </a:r>
+          </a:p>
+          <a:p>
+            <a:pPr>
+              <a:spcAft>
+                <a:spcPts val="600"/>
+              </a:spcAft>
+            </a:pPr>
+            <a:r>
+              <a:rPr sz="1600"/>
+              <a:t>Interleaving (Rohrer &amp; Taylor 2007): shuffled vs blocked → 63%</a:t>
+            </a:r>
+          </a:p>
+          <a:p>
+            <a:pPr algn="l">
+              <a:spcAft>
+                <a:spcPts val="800"/>
+              </a:spcAft>
+            </a:pPr>
+            <a:r>
+              <a:rPr sz="1800"/>
+              <a:t>vs 20% on transfer items at one-week delay (~3× lift).</a:t>
+            </a:r>
+          </a:p>
+          <a:p>
+            <a:pPr>
+              <a:spcAft>
+                <a:spcPts val="600"/>
+              </a:spcAft>
+            </a:pPr>
+            <a:r>
+              <a:rPr sz="1600"/>
+              <a:t>Generation effect (Slamecka &amp; Graf 1978): self-generated answers</a:t>
+            </a:r>
+          </a:p>
+          <a:p>
+            <a:pPr algn="l">
+              <a:spcAft>
+                <a:spcPts val="800"/>
+              </a:spcAft>
+            </a:pPr>
+            <a:r>
+              <a:rPr sz="1800"/>
+              <a:t>retained ~30% better than read answers.</a:t>
+            </a:r>
+          </a:p>
+          <a:p>
+            <a:pPr>
+              <a:spcAft>
+                <a:spcPts val="600"/>
+              </a:spcAft>
+            </a:pPr>
+            <a:r>
+              <a:rPr sz="1600"/>
+              <a:t>Cohort (Maven W1→W2 96% vs MOOC 16% — 14× retention multiplier;</a:t>
+            </a:r>
+          </a:p>
+          <a:p>
+            <a:pPr algn="l">
+              <a:spcAft>
+                <a:spcPts val="800"/>
+              </a:spcAft>
+            </a:pPr>
+            <a:r>
+              <a:rPr sz="1800"/>
+              <a:t>Reich &amp; Ruipérez-Valiente 2019, Science): peer + accountability is the largest single retention multiplier in ed-tech.</a:t>
+            </a:r>
+          </a:p>
+          <a:p>
+            <a:pPr>
+              <a:spcAft>
+                <a:spcPts val="600"/>
+              </a:spcAft>
+            </a:pPr>
+            <a:r>
+              <a:rPr sz="1600"/>
+              <a:t>Streak / variable reward (Eyal 2014; Skinner; Mazal 2022 on</a:t>
+            </a:r>
+          </a:p>
+          <a:p>
+            <a:pPr algn="l">
+              <a:spcAft>
+                <a:spcPts val="800"/>
+              </a:spcAft>
+            </a:pPr>
+            <a:r>
+              <a:rPr sz="1800"/>
+              <a:t>Duolingo): CURR +21%, DAU 4.5× over 4 years.</a:t>
+            </a:r>
+          </a:p>
+          <a:p>
+            <a:pPr>
+              <a:spcAft>
+                <a:spcPts val="600"/>
+              </a:spcAft>
+            </a:pPr>
+            <a:r>
+              <a:rPr sz="1600"/>
+              <a:t>Worked-example fading + expertise-reversal cutover (Sweller, van</a:t>
+            </a:r>
+          </a:p>
+          <a:p>
+            <a:pPr algn="l">
+              <a:spcAft>
+                <a:spcPts val="800"/>
+              </a:spcAft>
+            </a:pPr>
+            <a:r>
+              <a:rPr sz="1800"/>
+              <a:t>Merriënboer &amp; Paas 2019; Kalyuga 2003): the right scaffold per Dreyfus rung; avoids the LMS one-format-for-all failure.</a:t>
+            </a:r>
+          </a:p>
+          <a:p>
+            <a:pPr>
+              <a:spcAft>
+                <a:spcPts val="600"/>
+              </a:spcAft>
+            </a:pPr>
+            <a:r>
+              <a:rPr sz="1600"/>
+              <a:t>Calibration (Dunlosky &amp; Bjork; Kruger &amp; Dunning 1999): JOL pre-test</a:t>
+            </a:r>
+          </a:p>
+          <a:p>
+            <a:pPr algn="l">
+              <a:spcAft>
+                <a:spcPts val="800"/>
+              </a:spcAft>
+            </a:pPr>
+            <a:r>
+              <a:rPr sz="1800"/>
+              <a:t>+ Δ post-test → makes confidence trainable; mock pass-rate becomes predictive of real-exam pass-rate.</a:t>
+            </a:r>
+          </a:p>
+          <a:p>
+            <a:pPr algn="l">
+              <a:spcAft>
+                <a:spcPts val="800"/>
+              </a:spcAft>
+            </a:pPr>
+            <a:r>
+              <a:rPr sz="1800"/>
+              <a:t>We don't just teach with AI. We teach with peer-reviewed evidence.</a:t>
             </a:r>
           </a:p>
         </p:txBody>
@@ -4228,7 +4398,7 @@
                   <a:srgbClr val="1A1A2E"/>
                 </a:solidFill>
               </a:rPr>
-              <a:t>Roadmap to $100k MRR</a:t>
+              <a:t>Retention benchmarks — what we beat</a:t>
             </a:r>
           </a:p>
         </p:txBody>
@@ -4262,7 +4432,7 @@
             </a:pPr>
             <a:r>
               <a:rPr sz="1800"/>
-              <a:t>This is intentionally conservative. The unit economics support faster growth if a B2B reseller channel emerges.</a:t>
+              <a:t>Every claim falsifiable; every benchmark named.</a:t>
             </a:r>
           </a:p>
         </p:txBody>
@@ -4286,9 +4456,11 @@
                 <a:tableStyleId>{5C22544A-7EE6-4342-B048-85BDC9FD1C3A}</a:tableStyleId>
               </a:tblPr>
               <a:tblGrid>
-                <a:gridCol w="3749040"/>
-                <a:gridCol w="3749040"/>
-                <a:gridCol w="3749040"/>
+                <a:gridCol w="2249424"/>
+                <a:gridCol w="2249424"/>
+                <a:gridCol w="2249424"/>
+                <a:gridCol w="2249424"/>
+                <a:gridCol w="2249424"/>
               </a:tblGrid>
               <a:tr h="411480">
                 <a:tc>
@@ -4302,7 +4474,7 @@
                             <a:srgbClr val="FFFFFF"/>
                           </a:solidFill>
                         </a:rPr>
-                        <a:t>Milestone</a:t>
+                        <a:t>Benchmark</a:t>
                       </a:r>
                     </a:p>
                   </a:txBody>
@@ -4323,7 +4495,7 @@
                             <a:srgbClr val="FFFFFF"/>
                           </a:solidFill>
                         </a:rPr>
-                        <a:t>When</a:t>
+                        <a:t>Industry baseline</a:t>
                       </a:r>
                     </a:p>
                   </a:txBody>
@@ -4344,7 +4516,7 @@
                             <a:srgbClr val="FFFFFF"/>
                           </a:solidFill>
                         </a:rPr>
-                        <a:t>What's true</a:t>
+                        <a:t>Our targeted outcome</a:t>
                       </a:r>
                     </a:p>
                   </a:txBody>
@@ -4354,6 +4526,30 @@
                     </a:solidFill>
                   </a:tcPr>
                 </a:tc>
+                <a:tc>
+                  <a:txBody>
+                    <a:bodyPr/>
+                    <a:lstStyle/>
+                    <a:p/>
+                  </a:txBody>
+                  <a:tcPr>
+                    <a:solidFill>
+                      <a:srgbClr val="1A1A2E"/>
+                    </a:solidFill>
+                  </a:tcPr>
+                </a:tc>
+                <a:tc>
+                  <a:txBody>
+                    <a:bodyPr/>
+                    <a:lstStyle/>
+                    <a:p/>
+                  </a:txBody>
+                  <a:tcPr>
+                    <a:solidFill>
+                      <a:srgbClr val="1A1A2E"/>
+                    </a:solidFill>
+                  </a:tcPr>
+                </a:tc>
               </a:tr>
               <a:tr h="411480">
                 <a:tc>
@@ -4363,35 +4559,51 @@
                     <a:p>
                       <a:r>
                         <a:rPr sz="1100"/>
-                        <a:t>Phase 1 success-gate hit</a:t>
-                      </a:r>
-                    </a:p>
-                  </a:txBody>
-                  <a:tcPr/>
-                </a:tc>
-                <a:tc>
-                  <a:txBody>
-                    <a:bodyPr/>
-                    <a:lstStyle/>
-                    <a:p>
-                      <a:r>
-                        <a:rPr sz="1100"/>
-                        <a:t>Month 3</a:t>
-                      </a:r>
-                    </a:p>
-                  </a:txBody>
-                  <a:tcPr/>
-                </a:tc>
-                <a:tc>
-                  <a:txBody>
-                    <a:bodyPr/>
-                    <a:lstStyle/>
-                    <a:p>
-                      <a:r>
-                        <a:rPr sz="1100"/>
-                        <a:t>3 LOIs + 10 pre-orders</a:t>
-                      </a:r>
-                    </a:p>
+                        <a:t>MOOC completion</a:t>
+                      </a:r>
+                    </a:p>
+                  </a:txBody>
+                  <a:tcPr/>
+                </a:tc>
+                <a:tc>
+                  <a:txBody>
+                    <a:bodyPr/>
+                    <a:lstStyle/>
+                    <a:p>
+                      <a:r>
+                        <a:rPr sz="1100"/>
+                        <a:t>3–10% (Reich &amp; Ruipérez-Valiente 2019, Science)</a:t>
+                      </a:r>
+                    </a:p>
+                  </a:txBody>
+                  <a:tcPr/>
+                </a:tc>
+                <a:tc>
+                  <a:txBody>
+                    <a:bodyPr/>
+                    <a:lstStyle/>
+                    <a:p>
+                      <a:r>
+                        <a:rPr sz="1100"/>
+                        <a:t>Cohort tier ≥ 60% (vs Maven 96%, altMBA 96%)</a:t>
+                      </a:r>
+                    </a:p>
+                  </a:txBody>
+                  <a:tcPr/>
+                </a:tc>
+                <a:tc>
+                  <a:txBody>
+                    <a:bodyPr/>
+                    <a:lstStyle/>
+                    <a:p/>
+                  </a:txBody>
+                  <a:tcPr/>
+                </a:tc>
+                <a:tc>
+                  <a:txBody>
+                    <a:bodyPr/>
+                    <a:lstStyle/>
+                    <a:p/>
                   </a:txBody>
                   <a:tcPr/>
                 </a:tc>
@@ -4404,35 +4616,51 @@
                     <a:p>
                       <a:r>
                         <a:rPr sz="1100"/>
-                        <a:t>First B2B tenant onboarded</a:t>
-                      </a:r>
-                    </a:p>
-                  </a:txBody>
-                  <a:tcPr/>
-                </a:tc>
-                <a:tc>
-                  <a:txBody>
-                    <a:bodyPr/>
-                    <a:lstStyle/>
-                    <a:p>
-                      <a:r>
-                        <a:rPr sz="1100"/>
-                        <a:t>Month 4</a:t>
-                      </a:r>
-                    </a:p>
-                  </a:txBody>
-                  <a:tcPr/>
-                </a:tc>
-                <a:tc>
-                  <a:txBody>
-                    <a:bodyPr/>
-                    <a:lstStyle/>
-                    <a:p>
-                      <a:r>
-                        <a:rPr sz="1100"/>
-                        <a:t>$1k MRR</a:t>
-                      </a:r>
-                    </a:p>
+                        <a:t>Self-paced corporate completion</a:t>
+                      </a:r>
+                    </a:p>
+                  </a:txBody>
+                  <a:tcPr/>
+                </a:tc>
+                <a:tc>
+                  <a:txBody>
+                    <a:bodyPr/>
+                    <a:lstStyle/>
+                    <a:p>
+                      <a:r>
+                        <a:rPr sz="1100"/>
+                        <a:t>12–15% (KPI Depot 2026 / ATD 72% across mixed formats)</a:t>
+                      </a:r>
+                    </a:p>
+                  </a:txBody>
+                  <a:tcPr/>
+                </a:tc>
+                <a:tc>
+                  <a:txBody>
+                    <a:bodyPr/>
+                    <a:lstStyle/>
+                    <a:p>
+                      <a:r>
+                        <a:rPr sz="1100"/>
+                        <a:t>≥ 60% on cohort tier; live-interactive parity 85–95% achievable</a:t>
+                      </a:r>
+                    </a:p>
+                  </a:txBody>
+                  <a:tcPr/>
+                </a:tc>
+                <a:tc>
+                  <a:txBody>
+                    <a:bodyPr/>
+                    <a:lstStyle/>
+                    <a:p/>
+                  </a:txBody>
+                  <a:tcPr/>
+                </a:tc>
+                <a:tc>
+                  <a:txBody>
+                    <a:bodyPr/>
+                    <a:lstStyle/>
+                    <a:p/>
                   </a:txBody>
                   <a:tcPr/>
                 </a:tc>
@@ -4445,35 +4673,51 @@
                     <a:p>
                       <a:r>
                         <a:rPr sz="1100"/>
-                        <a:t>5 B2B tenants</a:t>
-                      </a:r>
-                    </a:p>
-                  </a:txBody>
-                  <a:tcPr/>
-                </a:tc>
-                <a:tc>
-                  <a:txBody>
-                    <a:bodyPr/>
-                    <a:lstStyle/>
-                    <a:p>
-                      <a:r>
-                        <a:rPr sz="1100"/>
-                        <a:t>Month 6</a:t>
-                      </a:r>
-                    </a:p>
-                  </a:txBody>
-                  <a:tcPr/>
-                </a:tc>
-                <a:tc>
-                  <a:txBody>
-                    <a:bodyPr/>
-                    <a:lstStyle/>
-                    <a:p>
-                      <a:r>
-                        <a:rPr sz="1100"/>
-                        <a:t>$5–10k MRR</a:t>
-                      </a:r>
-                    </a:p>
+                        <a:t>Mobile ed-tech D30 retention</a:t>
+                      </a:r>
+                    </a:p>
+                  </a:txBody>
+                  <a:tcPr/>
+                </a:tc>
+                <a:tc>
+                  <a:txBody>
+                    <a:bodyPr/>
+                    <a:lstStyle/>
+                    <a:p>
+                      <a:r>
+                        <a:rPr sz="1100"/>
+                        <a:t>~14% (a16z mobile retention guides)</a:t>
+                      </a:r>
+                    </a:p>
+                  </a:txBody>
+                  <a:tcPr/>
+                </a:tc>
+                <a:tc>
+                  <a:txBody>
+                    <a:bodyPr/>
+                    <a:lstStyle/>
+                    <a:p>
+                      <a:r>
+                        <a:rPr sz="1100"/>
+                        <a:t>≥ 35% (cohort tier)</a:t>
+                      </a:r>
+                    </a:p>
+                  </a:txBody>
+                  <a:tcPr/>
+                </a:tc>
+                <a:tc>
+                  <a:txBody>
+                    <a:bodyPr/>
+                    <a:lstStyle/>
+                    <a:p/>
+                  </a:txBody>
+                  <a:tcPr/>
+                </a:tc>
+                <a:tc>
+                  <a:txBody>
+                    <a:bodyPr/>
+                    <a:lstStyle/>
+                    <a:p/>
                   </a:txBody>
                   <a:tcPr/>
                 </a:tc>
@@ -4486,35 +4730,51 @@
                     <a:p>
                       <a:r>
                         <a:rPr sz="1100"/>
-                        <a:t>100 B2C Pro + 20 B2B</a:t>
-                      </a:r>
-                    </a:p>
-                  </a:txBody>
-                  <a:tcPr/>
-                </a:tc>
-                <a:tc>
-                  <a:txBody>
-                    <a:bodyPr/>
-                    <a:lstStyle/>
-                    <a:p>
-                      <a:r>
-                        <a:rPr sz="1100"/>
-                        <a:t>Month 12</a:t>
-                      </a:r>
-                    </a:p>
-                  </a:txBody>
-                  <a:tcPr/>
-                </a:tc>
-                <a:tc>
-                  <a:txBody>
-                    <a:bodyPr/>
-                    <a:lstStyle/>
-                    <a:p>
-                      <a:r>
-                        <a:rPr sz="1100"/>
-                        <a:t>~$25k MRR</a:t>
-                      </a:r>
-                    </a:p>
+                        <a:t>Mobile ed-tech D7 retention</a:t>
+                      </a:r>
+                    </a:p>
+                  </a:txBody>
+                  <a:tcPr/>
+                </a:tc>
+                <a:tc>
+                  <a:txBody>
+                    <a:bodyPr/>
+                    <a:lstStyle/>
+                    <a:p>
+                      <a:r>
+                        <a:rPr sz="1100"/>
+                        <a:t>~28%</a:t>
+                      </a:r>
+                    </a:p>
+                  </a:txBody>
+                  <a:tcPr/>
+                </a:tc>
+                <a:tc>
+                  <a:txBody>
+                    <a:bodyPr/>
+                    <a:lstStyle/>
+                    <a:p>
+                      <a:r>
+                        <a:rPr sz="1100"/>
+                        <a:t>≥ 40%</a:t>
+                      </a:r>
+                    </a:p>
+                  </a:txBody>
+                  <a:tcPr/>
+                </a:tc>
+                <a:tc>
+                  <a:txBody>
+                    <a:bodyPr/>
+                    <a:lstStyle/>
+                    <a:p/>
+                  </a:txBody>
+                  <a:tcPr/>
+                </a:tc>
+                <a:tc>
+                  <a:txBody>
+                    <a:bodyPr/>
+                    <a:lstStyle/>
+                    <a:p/>
                   </a:txBody>
                   <a:tcPr/>
                 </a:tc>
@@ -4527,35 +4787,51 @@
                     <a:p>
                       <a:r>
                         <a:rPr sz="1100"/>
-                        <a:t>Mid-market deal closes</a:t>
-                      </a:r>
-                    </a:p>
-                  </a:txBody>
-                  <a:tcPr/>
-                </a:tc>
-                <a:tc>
-                  <a:txBody>
-                    <a:bodyPr/>
-                    <a:lstStyle/>
-                    <a:p>
-                      <a:r>
-                        <a:rPr sz="1100"/>
-                        <a:t>Month 18</a:t>
-                      </a:r>
-                    </a:p>
-                  </a:txBody>
-                  <a:tcPr/>
-                </a:tc>
-                <a:tc>
-                  <a:txBody>
-                    <a:bodyPr/>
-                    <a:lstStyle/>
-                    <a:p>
-                      <a:r>
-                        <a:rPr sz="1100"/>
-                        <a:t>$15k+ MRR from one tenant</a:t>
-                      </a:r>
-                    </a:p>
+                        <a:t>W1→W2 retention</a:t>
+                      </a:r>
+                    </a:p>
+                  </a:txBody>
+                  <a:tcPr/>
+                </a:tc>
+                <a:tc>
+                  <a:txBody>
+                    <a:bodyPr/>
+                    <a:lstStyle/>
+                    <a:p>
+                      <a:r>
+                        <a:rPr sz="1100"/>
+                        <a:t>MOOC 16%</a:t>
+                      </a:r>
+                    </a:p>
+                  </a:txBody>
+                  <a:tcPr/>
+                </a:tc>
+                <a:tc>
+                  <a:txBody>
+                    <a:bodyPr/>
+                    <a:lstStyle/>
+                    <a:p>
+                      <a:r>
+                        <a:rPr sz="1100"/>
+                        <a:t>Cohort 96% (Maven precedent)</a:t>
+                      </a:r>
+                    </a:p>
+                  </a:txBody>
+                  <a:tcPr/>
+                </a:tc>
+                <a:tc>
+                  <a:txBody>
+                    <a:bodyPr/>
+                    <a:lstStyle/>
+                    <a:p/>
+                  </a:txBody>
+                  <a:tcPr/>
+                </a:tc>
+                <a:tc>
+                  <a:txBody>
+                    <a:bodyPr/>
+                    <a:lstStyle/>
+                    <a:p/>
                   </a:txBody>
                   <a:tcPr/>
                 </a:tc>
@@ -4568,33 +4844,54 @@
                     <a:p>
                       <a:r>
                         <a:rPr sz="1100"/>
-                        <a:t>$100k MRR</a:t>
-                      </a:r>
-                    </a:p>
-                  </a:txBody>
-                  <a:tcPr/>
-                </a:tc>
-                <a:tc>
-                  <a:txBody>
-                    <a:bodyPr/>
-                    <a:lstStyle/>
-                    <a:p>
-                      <a:r>
-                        <a:rPr sz="1100"/>
-                        <a:t>Month 24–30</a:t>
-                      </a:r>
-                    </a:p>
-                  </a:txBody>
-                  <a:tcPr/>
-                </a:tc>
-                <a:tc>
-                  <a:txBody>
-                    <a:bodyPr/>
-                    <a:lstStyle/>
-                    <a:p>
-                      <a:r>
-                        <a:rPr sz="1100"/>
-                        <a:t>Mix of ~50 B2B tenants and ~1k B2C Pro</a:t>
+                        <a:t>Calibration Δ (L2 Kirkpatrick)</a:t>
+                      </a:r>
+                    </a:p>
+                  </a:txBody>
+                  <a:tcPr/>
+                </a:tc>
+                <a:tc>
+                  <a:txBody>
+                    <a:bodyPr/>
+                    <a:lstStyle/>
+                    <a:p>
+                      <a:r>
+                        <a:rPr sz="1100"/>
+                        <a:t>not measured by competitors</a:t>
+                      </a:r>
+                    </a:p>
+                  </a:txBody>
+                  <a:tcPr/>
+                </a:tc>
+                <a:tc>
+                  <a:txBody>
+                    <a:bodyPr/>
+                    <a:lstStyle/>
+                    <a:p/>
+                  </a:txBody>
+                  <a:tcPr/>
+                </a:tc>
+                <a:tc>
+                  <a:txBody>
+                    <a:bodyPr/>
+                    <a:lstStyle/>
+                    <a:p>
+                      <a:r>
+                        <a:rPr sz="1100"/>
+                        <a:t>Δ</a:t>
+                      </a:r>
+                    </a:p>
+                  </a:txBody>
+                  <a:tcPr/>
+                </a:tc>
+                <a:tc>
+                  <a:txBody>
+                    <a:bodyPr/>
+                    <a:lstStyle/>
+                    <a:p>
+                      <a:r>
+                        <a:rPr sz="1100"/>
+                        <a:t>≤ 0.5 trending</a:t>
                       </a:r>
                     </a:p>
                   </a:txBody>
@@ -4652,6 +4949,1476 @@
                   <a:srgbClr val="1A1A2E"/>
                 </a:solidFill>
               </a:rPr>
+              <a:t>Segmentation TAM — the wedge order</a:t>
+            </a:r>
+          </a:p>
+        </p:txBody>
+      </p:sp>
+      <p:sp>
+        <p:nvSpPr>
+          <p:cNvPr id="3" name="TextBox 2"/>
+          <p:cNvSpPr txBox="1"/>
+          <p:nvPr/>
+        </p:nvSpPr>
+        <p:spPr>
+          <a:xfrm>
+            <a:off x="457200" y="1280160"/>
+            <a:ext cx="11247120" cy="5303520"/>
+          </a:xfrm>
+          <a:prstGeom prst="rect">
+            <a:avLst/>
+          </a:prstGeom>
+          <a:noFill/>
+        </p:spPr>
+        <p:txBody>
+          <a:bodyPr wrap="square">
+            <a:spAutoFit/>
+          </a:bodyPr>
+          <a:lstStyle/>
+          <a:p>
+            <a:pPr algn="l">
+              <a:spcAft>
+                <a:spcPts val="800"/>
+              </a:spcAft>
+            </a:pPr>
+            <a:r>
+              <a:rPr sz="1800"/>
+              <a:t>The market isn't undifferentiated. It segments cleanly:</a:t>
+            </a:r>
+          </a:p>
+          <a:p>
+            <a:pPr>
+              <a:spcAft>
+                <a:spcPts val="600"/>
+              </a:spcAft>
+            </a:pPr>
+            <a:r>
+              <a:rPr sz="1600"/>
+              <a:t>2.7B deskless workers globally; 80%+ of total workforce (TalentCards</a:t>
+            </a:r>
+          </a:p>
+          <a:p>
+            <a:pPr algn="l">
+              <a:spcAft>
+                <a:spcPts val="800"/>
+              </a:spcAft>
+            </a:pPr>
+            <a:r>
+              <a:rPr sz="1800"/>
+              <a:t>/ industry consensus). 90%+ want mobile-accessible training.</a:t>
+            </a:r>
+          </a:p>
+          <a:p>
+            <a:pPr>
+              <a:spcAft>
+                <a:spcPts val="600"/>
+              </a:spcAft>
+            </a:pPr>
+            <a:r>
+              <a:rPr sz="1600"/>
+              <a:t>Microlearning market $3.32B (2026) → $5.81B (2031), 11.83% CAGR</a:t>
+            </a:r>
+          </a:p>
+          <a:p>
+            <a:pPr algn="l">
+              <a:spcAft>
+                <a:spcPts val="800"/>
+              </a:spcAft>
+            </a:pPr>
+            <a:r>
+              <a:rPr sz="1800"/>
+              <a:t>(Mordor Intelligence). Retail leads at 21.53% revenue share 2025; healthcare/life-sciences highest CAGR at 15.22%.</a:t>
+            </a:r>
+          </a:p>
+          <a:p>
+            <a:pPr>
+              <a:spcAft>
+                <a:spcPts val="600"/>
+              </a:spcAft>
+            </a:pPr>
+            <a:r>
+              <a:rPr sz="1600"/>
+              <a:t>**39% of employees need reskilling by 2030; 49% of L&amp;D pros report</a:t>
+            </a:r>
+          </a:p>
+          <a:p>
+            <a:pPr algn="l">
+              <a:spcAft>
+                <a:spcPts val="800"/>
+              </a:spcAft>
+            </a:pPr>
+            <a:r>
+              <a:rPr sz="1800"/>
+              <a:t>exec concern about skill gaps** (LinkedIn Workplace Learning Report 2025).</a:t>
+            </a:r>
+          </a:p>
+          <a:p>
+            <a:pPr>
+              <a:spcAft>
+                <a:spcPts val="600"/>
+              </a:spcAft>
+            </a:pPr>
+            <a:r>
+              <a:rPr sz="1600"/>
+              <a:t>L&amp;D AI top priority for 2nd consecutive year, 22.6% vote share</a:t>
+            </a:r>
+          </a:p>
+          <a:p>
+            <a:pPr algn="l">
+              <a:spcAft>
+                <a:spcPts val="800"/>
+              </a:spcAft>
+            </a:pPr>
+            <a:r>
+              <a:rPr sz="1800"/>
+              <a:t>(Donald Taylor L&amp;D Global Sentiment Survey 2025; ~3000 voters, ~100 countries).</a:t>
+            </a:r>
+          </a:p>
+          <a:p>
+            <a:pPr algn="l">
+              <a:spcAft>
+                <a:spcPts val="800"/>
+              </a:spcAft>
+            </a:pPr>
+            <a:r>
+              <a:rPr sz="1800"/>
+              <a:t>Wedge order for go-to-market:</a:t>
+            </a:r>
+          </a:p>
+          <a:p>
+            <a:pPr>
+              <a:spcAft>
+                <a:spcPts val="600"/>
+              </a:spcAft>
+            </a:pPr>
+            <a:r>
+              <a:rPr sz="1600"/>
+              <a:t>Deskless verticals + single-SME-bottleneck SMBs first — lowest tooling</a:t>
+            </a:r>
+          </a:p>
+          <a:p>
+            <a:pPr algn="l">
+              <a:spcAft>
+                <a:spcPts val="800"/>
+              </a:spcAft>
+            </a:pPr>
+            <a:r>
+              <a:rPr sz="1800"/>
+              <a:t>competition; highest urgency on the SME side (bus-factor 1).</a:t>
+            </a:r>
+          </a:p>
+          <a:p>
+            <a:pPr>
+              <a:spcAft>
+                <a:spcPts val="600"/>
+              </a:spcAft>
+            </a:pPr>
+            <a:r>
+              <a:rPr sz="1600"/>
+              <a:t>Regulated enterprise second — highest ACV; &lt;70% completion ⇒ 3.5×</a:t>
+            </a:r>
+          </a:p>
+          <a:p>
+            <a:pPr algn="l">
+              <a:spcAft>
+                <a:spcPts val="800"/>
+              </a:spcAft>
+            </a:pPr>
+            <a:r>
+              <a:rPr sz="1800"/>
+              <a:t>compliance-violation rate makes calibration Δ a monetisable L4 outcome (KPI Depot 2026).</a:t>
+            </a:r>
+          </a:p>
+          <a:p>
+            <a:pPr>
+              <a:spcAft>
+                <a:spcPts val="600"/>
+              </a:spcAft>
+            </a:pPr>
+            <a:r>
+              <a:rPr sz="1600"/>
+              <a:t>B2C cert-prep continuing — CCA-F flagship; serves as the public</a:t>
+            </a:r>
+          </a:p>
+          <a:p>
+            <a:pPr algn="l">
+              <a:spcAft>
+                <a:spcPts val="800"/>
+              </a:spcAft>
+            </a:pPr>
+            <a:r>
+              <a:rPr sz="1800"/>
+              <a:t>case study and attribution channel.</a:t>
+            </a:r>
+          </a:p>
+        </p:txBody>
+      </p:sp>
+    </p:spTree>
+  </p:cSld>
+  <p:clrMapOvr>
+    <a:masterClrMapping/>
+  </p:clrMapOvr>
+</p:sld>
+</file>
+
+<file path=ppt/slides/slide17.xml><?xml version="1.0" encoding="utf-8"?>
+<p:sld xmlns:a="http://schemas.openxmlformats.org/drawingml/2006/main" xmlns:p="http://schemas.openxmlformats.org/presentationml/2006/main" xmlns:r="http://schemas.openxmlformats.org/officeDocument/2006/relationships">
+  <p:cSld>
+    <p:spTree>
+      <p:nvGrpSpPr>
+        <p:cNvPr id="1" name=""/>
+        <p:cNvGrpSpPr/>
+        <p:nvPr/>
+      </p:nvGrpSpPr>
+      <p:grpSpPr/>
+      <p:sp>
+        <p:nvSpPr>
+          <p:cNvPr id="2" name="TextBox 1"/>
+          <p:cNvSpPr txBox="1"/>
+          <p:nvPr/>
+        </p:nvSpPr>
+        <p:spPr>
+          <a:xfrm>
+            <a:off x="457200" y="274320"/>
+            <a:ext cx="11247120" cy="914400"/>
+          </a:xfrm>
+          <a:prstGeom prst="rect">
+            <a:avLst/>
+          </a:prstGeom>
+          <a:noFill/>
+        </p:spPr>
+        <p:txBody>
+          <a:bodyPr wrap="square">
+            <a:spAutoFit/>
+          </a:bodyPr>
+          <a:lstStyle/>
+          <a:p>
+            <a:pPr algn="l"/>
+            <a:r>
+              <a:rPr sz="2800" b="1">
+                <a:solidFill>
+                  <a:srgbClr val="1A1A2E"/>
+                </a:solidFill>
+              </a:rPr>
+              <a:t>Why this works (mechanism + measurement)</a:t>
+            </a:r>
+          </a:p>
+        </p:txBody>
+      </p:sp>
+      <p:sp>
+        <p:nvSpPr>
+          <p:cNvPr id="3" name="TextBox 2"/>
+          <p:cNvSpPr txBox="1"/>
+          <p:nvPr/>
+        </p:nvSpPr>
+        <p:spPr>
+          <a:xfrm>
+            <a:off x="457200" y="1280160"/>
+            <a:ext cx="11247120" cy="5303520"/>
+          </a:xfrm>
+          <a:prstGeom prst="rect">
+            <a:avLst/>
+          </a:prstGeom>
+          <a:noFill/>
+        </p:spPr>
+        <p:txBody>
+          <a:bodyPr wrap="square">
+            <a:spAutoFit/>
+          </a:bodyPr>
+          <a:lstStyle/>
+          <a:p>
+            <a:pPr algn="l">
+              <a:spcAft>
+                <a:spcPts val="800"/>
+              </a:spcAft>
+            </a:pPr>
+            <a:r>
+              <a:rPr sz="1800"/>
+              <a:t>Eight learner-absorption mechanisms (LM1–LM8):</a:t>
+            </a:r>
+          </a:p>
+          <a:p>
+            <a:pPr algn="l">
+              <a:spcAft>
+                <a:spcPts val="800"/>
+              </a:spcAft>
+            </a:pPr>
+            <a:r>
+              <a:rPr sz="1800"/>
+              <a:t>Eight SME-elicitation scaffolds (SM1–SM8) — CTA intake (+46% learning gain on resulting instruction, Cohen's d ≈ 1.72; Lee 2004 / Tofel-Grehl &amp; Feldon 2013), backward-design (Wiggins &amp; McTighe 1998), worked-example pair (Sweller; Renkl), expert-blind-spot probe (Nathan &amp; Petrosino 2003), principle-tag picker, 4C/ID coverage gate (van Merriënboer 1997), voice-first capture (Polanyi 1966), per-SME blind-spot dashboard (Ericsson 1993 — deliberate-practice feedback channel).</a:t>
+            </a:r>
+          </a:p>
+          <a:p>
+            <a:pPr algn="l">
+              <a:spcAft>
+                <a:spcPts val="800"/>
+              </a:spcAft>
+            </a:pPr>
+            <a:r>
+              <a:rPr sz="1800"/>
+              <a:t>Each claim falsifiable via L1–L4 Kirkpatrick measurement built in from day one. Not aspirational.</a:t>
+            </a:r>
+          </a:p>
+        </p:txBody>
+      </p:sp>
+      <p:graphicFrame>
+        <p:nvGraphicFramePr>
+          <p:cNvPr id="4" name="Table 3"/>
+          <p:cNvGraphicFramePr>
+            <a:graphicFrameLocks noGrp="1"/>
+          </p:cNvGraphicFramePr>
+          <p:nvPr/>
+        </p:nvGraphicFramePr>
+        <p:xfrm>
+          <a:off x="457200" y="2240280"/>
+          <a:ext cx="11247120" cy="3703320"/>
+        </p:xfrm>
+        <a:graphic>
+          <a:graphicData uri="http://schemas.openxmlformats.org/drawingml/2006/table">
+            <a:tbl>
+              <a:tblPr firstRow="1" bandRow="1">
+                <a:tableStyleId>{5C22544A-7EE6-4342-B048-85BDC9FD1C3A}</a:tableStyleId>
+              </a:tblPr>
+              <a:tblGrid>
+                <a:gridCol w="5623560"/>
+                <a:gridCol w="5623560"/>
+              </a:tblGrid>
+              <a:tr h="411480">
+                <a:tc>
+                  <a:txBody>
+                    <a:bodyPr/>
+                    <a:lstStyle/>
+                    <a:p>
+                      <a:r>
+                        <a:rPr sz="1100" b="1">
+                          <a:solidFill>
+                            <a:srgbClr val="FFFFFF"/>
+                          </a:solidFill>
+                        </a:rPr>
+                        <a:t>Mechanism</a:t>
+                      </a:r>
+                    </a:p>
+                  </a:txBody>
+                  <a:tcPr>
+                    <a:solidFill>
+                      <a:srgbClr val="1A1A2E"/>
+                    </a:solidFill>
+                  </a:tcPr>
+                </a:tc>
+                <a:tc>
+                  <a:txBody>
+                    <a:bodyPr/>
+                    <a:lstStyle/>
+                    <a:p>
+                      <a:r>
+                        <a:rPr sz="1100" b="1">
+                          <a:solidFill>
+                            <a:srgbClr val="FFFFFF"/>
+                          </a:solidFill>
+                        </a:rPr>
+                        <a:t>Cited effect size</a:t>
+                      </a:r>
+                    </a:p>
+                  </a:txBody>
+                  <a:tcPr>
+                    <a:solidFill>
+                      <a:srgbClr val="1A1A2E"/>
+                    </a:solidFill>
+                  </a:tcPr>
+                </a:tc>
+              </a:tr>
+              <a:tr h="411480">
+                <a:tc>
+                  <a:txBody>
+                    <a:bodyPr/>
+                    <a:lstStyle/>
+                    <a:p>
+                      <a:r>
+                        <a:rPr sz="1100"/>
+                        <a:t>LM1 Spacing</a:t>
+                      </a:r>
+                    </a:p>
+                  </a:txBody>
+                  <a:tcPr/>
+                </a:tc>
+                <a:tc>
+                  <a:txBody>
+                    <a:bodyPr/>
+                    <a:lstStyle/>
+                    <a:p>
+                      <a:r>
+                        <a:rPr sz="1100"/>
+                        <a:t>2× (Cepeda 2008)</a:t>
+                      </a:r>
+                    </a:p>
+                  </a:txBody>
+                  <a:tcPr/>
+                </a:tc>
+              </a:tr>
+              <a:tr h="411480">
+                <a:tc>
+                  <a:txBody>
+                    <a:bodyPr/>
+                    <a:lstStyle/>
+                    <a:p>
+                      <a:r>
+                        <a:rPr sz="1100"/>
+                        <a:t>LM2 Retrieval</a:t>
+                      </a:r>
+                    </a:p>
+                  </a:txBody>
+                  <a:tcPr/>
+                </a:tc>
+                <a:tc>
+                  <a:txBody>
+                    <a:bodyPr/>
+                    <a:lstStyle/>
+                    <a:p>
+                      <a:r>
+                        <a:rPr sz="1100"/>
+                        <a:t>~50% lift (Roediger &amp; Karpicke 2006)</a:t>
+                      </a:r>
+                    </a:p>
+                  </a:txBody>
+                  <a:tcPr/>
+                </a:tc>
+              </a:tr>
+              <a:tr h="411480">
+                <a:tc>
+                  <a:txBody>
+                    <a:bodyPr/>
+                    <a:lstStyle/>
+                    <a:p>
+                      <a:r>
+                        <a:rPr sz="1100"/>
+                        <a:t>LM3 Generation</a:t>
+                      </a:r>
+                    </a:p>
+                  </a:txBody>
+                  <a:tcPr/>
+                </a:tc>
+                <a:tc>
+                  <a:txBody>
+                    <a:bodyPr/>
+                    <a:lstStyle/>
+                    <a:p>
+                      <a:r>
+                        <a:rPr sz="1100"/>
+                        <a:t>+30% (Slamecka &amp; Graf 1978)</a:t>
+                      </a:r>
+                    </a:p>
+                  </a:txBody>
+                  <a:tcPr/>
+                </a:tc>
+              </a:tr>
+              <a:tr h="411480">
+                <a:tc>
+                  <a:txBody>
+                    <a:bodyPr/>
+                    <a:lstStyle/>
+                    <a:p>
+                      <a:r>
+                        <a:rPr sz="1100"/>
+                        <a:t>LM4 Interleaving</a:t>
+                      </a:r>
+                    </a:p>
+                  </a:txBody>
+                  <a:tcPr/>
+                </a:tc>
+                <a:tc>
+                  <a:txBody>
+                    <a:bodyPr/>
+                    <a:lstStyle/>
+                    <a:p>
+                      <a:r>
+                        <a:rPr sz="1100"/>
+                        <a:t>3× transfer lift (Rohrer &amp; Taylor 2007)</a:t>
+                      </a:r>
+                    </a:p>
+                  </a:txBody>
+                  <a:tcPr/>
+                </a:tc>
+              </a:tr>
+              <a:tr h="411480">
+                <a:tc>
+                  <a:txBody>
+                    <a:bodyPr/>
+                    <a:lstStyle/>
+                    <a:p>
+                      <a:r>
+                        <a:rPr sz="1100"/>
+                        <a:t>LM5 Worked-example fading + expertise-reversal cutover</a:t>
+                      </a:r>
+                    </a:p>
+                  </a:txBody>
+                  <a:tcPr/>
+                </a:tc>
+                <a:tc>
+                  <a:txBody>
+                    <a:bodyPr/>
+                    <a:lstStyle/>
+                    <a:p>
+                      <a:r>
+                        <a:rPr sz="1100"/>
+                        <a:t>(Sweller 2019; Kalyuga 2003)</a:t>
+                      </a:r>
+                    </a:p>
+                  </a:txBody>
+                  <a:tcPr/>
+                </a:tc>
+              </a:tr>
+              <a:tr h="411480">
+                <a:tc>
+                  <a:txBody>
+                    <a:bodyPr/>
+                    <a:lstStyle/>
+                    <a:p>
+                      <a:r>
+                        <a:rPr sz="1100"/>
+                        <a:t>LM6 Calibration capture</a:t>
+                      </a:r>
+                    </a:p>
+                  </a:txBody>
+                  <a:tcPr/>
+                </a:tc>
+                <a:tc>
+                  <a:txBody>
+                    <a:bodyPr/>
+                    <a:lstStyle/>
+                    <a:p>
+                      <a:r>
+                        <a:rPr sz="1100"/>
+                        <a:t>(Dunlosky &amp; Bjork; Kruger &amp; Dunning 1999)</a:t>
+                      </a:r>
+                    </a:p>
+                  </a:txBody>
+                  <a:tcPr/>
+                </a:tc>
+              </a:tr>
+              <a:tr h="411480">
+                <a:tc>
+                  <a:txBody>
+                    <a:bodyPr/>
+                    <a:lstStyle/>
+                    <a:p>
+                      <a:r>
+                        <a:rPr sz="1100"/>
+                        <a:t>LM7 Streak / variable-reward</a:t>
+                      </a:r>
+                    </a:p>
+                  </a:txBody>
+                  <a:tcPr/>
+                </a:tc>
+                <a:tc>
+                  <a:txBody>
+                    <a:bodyPr/>
+                    <a:lstStyle/>
+                    <a:p>
+                      <a:r>
+                        <a:rPr sz="1100"/>
+                        <a:t>CURR +21%, DAU 4.5× (Mazal/Duolingo 2022)</a:t>
+                      </a:r>
+                    </a:p>
+                  </a:txBody>
+                  <a:tcPr/>
+                </a:tc>
+              </a:tr>
+              <a:tr h="411480">
+                <a:tc>
+                  <a:txBody>
+                    <a:bodyPr/>
+                    <a:lstStyle/>
+                    <a:p>
+                      <a:r>
+                        <a:rPr sz="1100"/>
+                        <a:t>LM8 Cohort</a:t>
+                      </a:r>
+                    </a:p>
+                  </a:txBody>
+                  <a:tcPr/>
+                </a:tc>
+                <a:tc>
+                  <a:txBody>
+                    <a:bodyPr/>
+                    <a:lstStyle/>
+                    <a:p>
+                      <a:r>
+                        <a:rPr sz="1100"/>
+                        <a:t>14× retention vs MOOC (Maven; Reich 2019, Science)</a:t>
+                      </a:r>
+                    </a:p>
+                  </a:txBody>
+                  <a:tcPr/>
+                </a:tc>
+              </a:tr>
+            </a:tbl>
+          </a:graphicData>
+        </a:graphic>
+      </p:graphicFrame>
+    </p:spTree>
+  </p:cSld>
+  <p:clrMapOvr>
+    <a:masterClrMapping/>
+  </p:clrMapOvr>
+</p:sld>
+</file>
+
+<file path=ppt/slides/slide18.xml><?xml version="1.0" encoding="utf-8"?>
+<p:sld xmlns:a="http://schemas.openxmlformats.org/drawingml/2006/main" xmlns:p="http://schemas.openxmlformats.org/presentationml/2006/main" xmlns:r="http://schemas.openxmlformats.org/officeDocument/2006/relationships">
+  <p:cSld>
+    <p:spTree>
+      <p:nvGrpSpPr>
+        <p:cNvPr id="1" name=""/>
+        <p:cNvGrpSpPr/>
+        <p:nvPr/>
+      </p:nvGrpSpPr>
+      <p:grpSpPr/>
+      <p:sp>
+        <p:nvSpPr>
+          <p:cNvPr id="2" name="TextBox 1"/>
+          <p:cNvSpPr txBox="1"/>
+          <p:nvPr/>
+        </p:nvSpPr>
+        <p:spPr>
+          <a:xfrm>
+            <a:off x="457200" y="274320"/>
+            <a:ext cx="11247120" cy="914400"/>
+          </a:xfrm>
+          <a:prstGeom prst="rect">
+            <a:avLst/>
+          </a:prstGeom>
+          <a:noFill/>
+        </p:spPr>
+        <p:txBody>
+          <a:bodyPr wrap="square">
+            <a:spAutoFit/>
+          </a:bodyPr>
+          <a:lstStyle/>
+          <a:p>
+            <a:pPr algn="l"/>
+            <a:r>
+              <a:rPr sz="2800" b="1">
+                <a:solidFill>
+                  <a:srgbClr val="1A1A2E"/>
+                </a:solidFill>
+              </a:rPr>
+              <a:t>Founder fit</a:t>
+            </a:r>
+          </a:p>
+        </p:txBody>
+      </p:sp>
+      <p:sp>
+        <p:nvSpPr>
+          <p:cNvPr id="3" name="TextBox 2"/>
+          <p:cNvSpPr txBox="1"/>
+          <p:nvPr/>
+        </p:nvSpPr>
+        <p:spPr>
+          <a:xfrm>
+            <a:off x="457200" y="1280160"/>
+            <a:ext cx="11247120" cy="5303520"/>
+          </a:xfrm>
+          <a:prstGeom prst="rect">
+            <a:avLst/>
+          </a:prstGeom>
+          <a:noFill/>
+        </p:spPr>
+        <p:txBody>
+          <a:bodyPr wrap="square">
+            <a:spAutoFit/>
+          </a:bodyPr>
+          <a:lstStyle/>
+          <a:p>
+            <a:pPr/>
+            <a:r>
+              <a:rPr sz="1600"/>
+              <a:t>Senior developer (15+ years), structured-thinking-strong (ABAP background — schema and process discipline).</a:t>
+            </a:r>
+          </a:p>
+          <a:p>
+            <a:pPr/>
+            <a:r>
+              <a:rPr sz="1600"/>
+              <a:t>Building from a real artifact: a personal CCA-F study repo with mock exams, error-log analytics, and the failure-mode taxonomy that becomes the platform's moat.</a:t>
+            </a:r>
+          </a:p>
+          <a:p>
+            <a:pPr/>
+            <a:r>
+              <a:rPr sz="1600"/>
+              <a:t>Hands-on operator profile — comfortable doing all four of: write code, write content, write copy, talk to customers.</a:t>
+            </a:r>
+          </a:p>
+          <a:p>
+            <a:pPr>
+              <a:spcAft>
+                <a:spcPts val="600"/>
+              </a:spcAft>
+            </a:pPr>
+            <a:r>
+              <a:rPr sz="1600"/>
+              <a:t>Day job is unrelated; this is a side bet, not a stake-everything-on-it situation. Right shape for capital-efficient validation, wrong shape for "fund-the-team-of-12."</a:t>
+            </a:r>
+          </a:p>
+        </p:txBody>
+      </p:sp>
+    </p:spTree>
+  </p:cSld>
+  <p:clrMapOvr>
+    <a:masterClrMapping/>
+  </p:clrMapOvr>
+</p:sld>
+</file>
+
+<file path=ppt/slides/slide19.xml><?xml version="1.0" encoding="utf-8"?>
+<p:sld xmlns:a="http://schemas.openxmlformats.org/drawingml/2006/main" xmlns:p="http://schemas.openxmlformats.org/presentationml/2006/main" xmlns:r="http://schemas.openxmlformats.org/officeDocument/2006/relationships">
+  <p:cSld>
+    <p:spTree>
+      <p:nvGrpSpPr>
+        <p:cNvPr id="1" name=""/>
+        <p:cNvGrpSpPr/>
+        <p:nvPr/>
+      </p:nvGrpSpPr>
+      <p:grpSpPr/>
+      <p:sp>
+        <p:nvSpPr>
+          <p:cNvPr id="2" name="TextBox 1"/>
+          <p:cNvSpPr txBox="1"/>
+          <p:nvPr/>
+        </p:nvSpPr>
+        <p:spPr>
+          <a:xfrm>
+            <a:off x="457200" y="274320"/>
+            <a:ext cx="11247120" cy="914400"/>
+          </a:xfrm>
+          <a:prstGeom prst="rect">
+            <a:avLst/>
+          </a:prstGeom>
+          <a:noFill/>
+        </p:spPr>
+        <p:txBody>
+          <a:bodyPr wrap="square">
+            <a:spAutoFit/>
+          </a:bodyPr>
+          <a:lstStyle/>
+          <a:p>
+            <a:pPr algn="l"/>
+            <a:r>
+              <a:rPr sz="2800" b="1">
+                <a:solidFill>
+                  <a:srgbClr val="1A1A2E"/>
+                </a:solidFill>
+              </a:rPr>
+              <a:t>Roadmap to $100k MRR</a:t>
+            </a:r>
+          </a:p>
+        </p:txBody>
+      </p:sp>
+      <p:sp>
+        <p:nvSpPr>
+          <p:cNvPr id="3" name="TextBox 2"/>
+          <p:cNvSpPr txBox="1"/>
+          <p:nvPr/>
+        </p:nvSpPr>
+        <p:spPr>
+          <a:xfrm>
+            <a:off x="457200" y="1280160"/>
+            <a:ext cx="11247120" cy="5303520"/>
+          </a:xfrm>
+          <a:prstGeom prst="rect">
+            <a:avLst/>
+          </a:prstGeom>
+          <a:noFill/>
+        </p:spPr>
+        <p:txBody>
+          <a:bodyPr wrap="square">
+            <a:spAutoFit/>
+          </a:bodyPr>
+          <a:lstStyle/>
+          <a:p>
+            <a:pPr algn="l">
+              <a:spcAft>
+                <a:spcPts val="800"/>
+              </a:spcAft>
+            </a:pPr>
+            <a:r>
+              <a:rPr sz="1800"/>
+              <a:t>This is intentionally conservative. The unit economics support faster growth if a B2B reseller channel emerges.</a:t>
+            </a:r>
+          </a:p>
+        </p:txBody>
+      </p:sp>
+      <p:graphicFrame>
+        <p:nvGraphicFramePr>
+          <p:cNvPr id="4" name="Table 3"/>
+          <p:cNvGraphicFramePr>
+            <a:graphicFrameLocks noGrp="1"/>
+          </p:cNvGraphicFramePr>
+          <p:nvPr/>
+        </p:nvGraphicFramePr>
+        <p:xfrm>
+          <a:off x="457200" y="1828800"/>
+          <a:ext cx="11247120" cy="3291840"/>
+        </p:xfrm>
+        <a:graphic>
+          <a:graphicData uri="http://schemas.openxmlformats.org/drawingml/2006/table">
+            <a:tbl>
+              <a:tblPr firstRow="1" bandRow="1">
+                <a:tableStyleId>{5C22544A-7EE6-4342-B048-85BDC9FD1C3A}</a:tableStyleId>
+              </a:tblPr>
+              <a:tblGrid>
+                <a:gridCol w="2249424"/>
+                <a:gridCol w="2249424"/>
+                <a:gridCol w="2249424"/>
+                <a:gridCol w="2249424"/>
+                <a:gridCol w="2249424"/>
+              </a:tblGrid>
+              <a:tr h="411480">
+                <a:tc>
+                  <a:txBody>
+                    <a:bodyPr/>
+                    <a:lstStyle/>
+                    <a:p>
+                      <a:r>
+                        <a:rPr sz="1100" b="1">
+                          <a:solidFill>
+                            <a:srgbClr val="FFFFFF"/>
+                          </a:solidFill>
+                        </a:rPr>
+                        <a:t>Milestone</a:t>
+                      </a:r>
+                    </a:p>
+                  </a:txBody>
+                  <a:tcPr>
+                    <a:solidFill>
+                      <a:srgbClr val="1A1A2E"/>
+                    </a:solidFill>
+                  </a:tcPr>
+                </a:tc>
+                <a:tc>
+                  <a:txBody>
+                    <a:bodyPr/>
+                    <a:lstStyle/>
+                    <a:p>
+                      <a:r>
+                        <a:rPr sz="1100" b="1">
+                          <a:solidFill>
+                            <a:srgbClr val="FFFFFF"/>
+                          </a:solidFill>
+                        </a:rPr>
+                        <a:t>When</a:t>
+                      </a:r>
+                    </a:p>
+                  </a:txBody>
+                  <a:tcPr>
+                    <a:solidFill>
+                      <a:srgbClr val="1A1A2E"/>
+                    </a:solidFill>
+                  </a:tcPr>
+                </a:tc>
+                <a:tc>
+                  <a:txBody>
+                    <a:bodyPr/>
+                    <a:lstStyle/>
+                    <a:p>
+                      <a:r>
+                        <a:rPr sz="1100" b="1">
+                          <a:solidFill>
+                            <a:srgbClr val="FFFFFF"/>
+                          </a:solidFill>
+                        </a:rPr>
+                        <a:t>What's true</a:t>
+                      </a:r>
+                    </a:p>
+                  </a:txBody>
+                  <a:tcPr>
+                    <a:solidFill>
+                      <a:srgbClr val="1A1A2E"/>
+                    </a:solidFill>
+                  </a:tcPr>
+                </a:tc>
+                <a:tc>
+                  <a:txBody>
+                    <a:bodyPr/>
+                    <a:lstStyle/>
+                    <a:p/>
+                  </a:txBody>
+                  <a:tcPr>
+                    <a:solidFill>
+                      <a:srgbClr val="1A1A2E"/>
+                    </a:solidFill>
+                  </a:tcPr>
+                </a:tc>
+                <a:tc>
+                  <a:txBody>
+                    <a:bodyPr/>
+                    <a:lstStyle/>
+                    <a:p/>
+                  </a:txBody>
+                  <a:tcPr>
+                    <a:solidFill>
+                      <a:srgbClr val="1A1A2E"/>
+                    </a:solidFill>
+                  </a:tcPr>
+                </a:tc>
+              </a:tr>
+              <a:tr h="411480">
+                <a:tc>
+                  <a:txBody>
+                    <a:bodyPr/>
+                    <a:lstStyle/>
+                    <a:p>
+                      <a:r>
+                        <a:rPr sz="1100"/>
+                        <a:t>Phase 1 success-gate hit</a:t>
+                      </a:r>
+                    </a:p>
+                  </a:txBody>
+                  <a:tcPr/>
+                </a:tc>
+                <a:tc>
+                  <a:txBody>
+                    <a:bodyPr/>
+                    <a:lstStyle/>
+                    <a:p>
+                      <a:r>
+                        <a:rPr sz="1100"/>
+                        <a:t>Month 3</a:t>
+                      </a:r>
+                    </a:p>
+                  </a:txBody>
+                  <a:tcPr/>
+                </a:tc>
+                <a:tc>
+                  <a:txBody>
+                    <a:bodyPr/>
+                    <a:lstStyle/>
+                    <a:p>
+                      <a:r>
+                        <a:rPr sz="1100"/>
+                        <a:t>3 LOIs + 10 pre-orders</a:t>
+                      </a:r>
+                    </a:p>
+                  </a:txBody>
+                  <a:tcPr/>
+                </a:tc>
+                <a:tc>
+                  <a:txBody>
+                    <a:bodyPr/>
+                    <a:lstStyle/>
+                    <a:p/>
+                  </a:txBody>
+                  <a:tcPr/>
+                </a:tc>
+                <a:tc>
+                  <a:txBody>
+                    <a:bodyPr/>
+                    <a:lstStyle/>
+                    <a:p/>
+                  </a:txBody>
+                  <a:tcPr/>
+                </a:tc>
+              </a:tr>
+              <a:tr h="411480">
+                <a:tc>
+                  <a:txBody>
+                    <a:bodyPr/>
+                    <a:lstStyle/>
+                    <a:p>
+                      <a:r>
+                        <a:rPr sz="1100"/>
+                        <a:t>First B2B tenant onboarded</a:t>
+                      </a:r>
+                    </a:p>
+                  </a:txBody>
+                  <a:tcPr/>
+                </a:tc>
+                <a:tc>
+                  <a:txBody>
+                    <a:bodyPr/>
+                    <a:lstStyle/>
+                    <a:p>
+                      <a:r>
+                        <a:rPr sz="1100"/>
+                        <a:t>Month 4</a:t>
+                      </a:r>
+                    </a:p>
+                  </a:txBody>
+                  <a:tcPr/>
+                </a:tc>
+                <a:tc>
+                  <a:txBody>
+                    <a:bodyPr/>
+                    <a:lstStyle/>
+                    <a:p>
+                      <a:r>
+                        <a:rPr sz="1100"/>
+                        <a:t>$1k MRR</a:t>
+                      </a:r>
+                    </a:p>
+                  </a:txBody>
+                  <a:tcPr/>
+                </a:tc>
+                <a:tc>
+                  <a:txBody>
+                    <a:bodyPr/>
+                    <a:lstStyle/>
+                    <a:p/>
+                  </a:txBody>
+                  <a:tcPr/>
+                </a:tc>
+                <a:tc>
+                  <a:txBody>
+                    <a:bodyPr/>
+                    <a:lstStyle/>
+                    <a:p/>
+                  </a:txBody>
+                  <a:tcPr/>
+                </a:tc>
+              </a:tr>
+              <a:tr h="411480">
+                <a:tc>
+                  <a:txBody>
+                    <a:bodyPr/>
+                    <a:lstStyle/>
+                    <a:p>
+                      <a:r>
+                        <a:rPr sz="1100"/>
+                        <a:t>5 B2B tenants</a:t>
+                      </a:r>
+                    </a:p>
+                  </a:txBody>
+                  <a:tcPr/>
+                </a:tc>
+                <a:tc>
+                  <a:txBody>
+                    <a:bodyPr/>
+                    <a:lstStyle/>
+                    <a:p>
+                      <a:r>
+                        <a:rPr sz="1100"/>
+                        <a:t>Month 6</a:t>
+                      </a:r>
+                    </a:p>
+                  </a:txBody>
+                  <a:tcPr/>
+                </a:tc>
+                <a:tc>
+                  <a:txBody>
+                    <a:bodyPr/>
+                    <a:lstStyle/>
+                    <a:p>
+                      <a:r>
+                        <a:rPr sz="1100"/>
+                        <a:t>$5–10k MRR</a:t>
+                      </a:r>
+                    </a:p>
+                  </a:txBody>
+                  <a:tcPr/>
+                </a:tc>
+                <a:tc>
+                  <a:txBody>
+                    <a:bodyPr/>
+                    <a:lstStyle/>
+                    <a:p/>
+                  </a:txBody>
+                  <a:tcPr/>
+                </a:tc>
+                <a:tc>
+                  <a:txBody>
+                    <a:bodyPr/>
+                    <a:lstStyle/>
+                    <a:p/>
+                  </a:txBody>
+                  <a:tcPr/>
+                </a:tc>
+              </a:tr>
+              <a:tr h="411480">
+                <a:tc>
+                  <a:txBody>
+                    <a:bodyPr/>
+                    <a:lstStyle/>
+                    <a:p>
+                      <a:r>
+                        <a:rPr sz="1100"/>
+                        <a:t>100 B2C Pro + 20 B2B</a:t>
+                      </a:r>
+                    </a:p>
+                  </a:txBody>
+                  <a:tcPr/>
+                </a:tc>
+                <a:tc>
+                  <a:txBody>
+                    <a:bodyPr/>
+                    <a:lstStyle/>
+                    <a:p>
+                      <a:r>
+                        <a:rPr sz="1100"/>
+                        <a:t>Month 12</a:t>
+                      </a:r>
+                    </a:p>
+                  </a:txBody>
+                  <a:tcPr/>
+                </a:tc>
+                <a:tc>
+                  <a:txBody>
+                    <a:bodyPr/>
+                    <a:lstStyle/>
+                    <a:p>
+                      <a:r>
+                        <a:rPr sz="1100"/>
+                        <a:t>~$25k MRR</a:t>
+                      </a:r>
+                    </a:p>
+                  </a:txBody>
+                  <a:tcPr/>
+                </a:tc>
+                <a:tc>
+                  <a:txBody>
+                    <a:bodyPr/>
+                    <a:lstStyle/>
+                    <a:p/>
+                  </a:txBody>
+                  <a:tcPr/>
+                </a:tc>
+                <a:tc>
+                  <a:txBody>
+                    <a:bodyPr/>
+                    <a:lstStyle/>
+                    <a:p/>
+                  </a:txBody>
+                  <a:tcPr/>
+                </a:tc>
+              </a:tr>
+              <a:tr h="411480">
+                <a:tc>
+                  <a:txBody>
+                    <a:bodyPr/>
+                    <a:lstStyle/>
+                    <a:p>
+                      <a:r>
+                        <a:rPr sz="1100"/>
+                        <a:t>Mid-market deal closes</a:t>
+                      </a:r>
+                    </a:p>
+                  </a:txBody>
+                  <a:tcPr/>
+                </a:tc>
+                <a:tc>
+                  <a:txBody>
+                    <a:bodyPr/>
+                    <a:lstStyle/>
+                    <a:p>
+                      <a:r>
+                        <a:rPr sz="1100"/>
+                        <a:t>Month 18</a:t>
+                      </a:r>
+                    </a:p>
+                  </a:txBody>
+                  <a:tcPr/>
+                </a:tc>
+                <a:tc>
+                  <a:txBody>
+                    <a:bodyPr/>
+                    <a:lstStyle/>
+                    <a:p>
+                      <a:r>
+                        <a:rPr sz="1100"/>
+                        <a:t>$15k+ MRR from one tenant</a:t>
+                      </a:r>
+                    </a:p>
+                  </a:txBody>
+                  <a:tcPr/>
+                </a:tc>
+                <a:tc>
+                  <a:txBody>
+                    <a:bodyPr/>
+                    <a:lstStyle/>
+                    <a:p/>
+                  </a:txBody>
+                  <a:tcPr/>
+                </a:tc>
+                <a:tc>
+                  <a:txBody>
+                    <a:bodyPr/>
+                    <a:lstStyle/>
+                    <a:p/>
+                  </a:txBody>
+                  <a:tcPr/>
+                </a:tc>
+              </a:tr>
+              <a:tr h="411480">
+                <a:tc>
+                  <a:txBody>
+                    <a:bodyPr/>
+                    <a:lstStyle/>
+                    <a:p>
+                      <a:r>
+                        <a:rPr sz="1100"/>
+                        <a:t>$100k MRR</a:t>
+                      </a:r>
+                    </a:p>
+                  </a:txBody>
+                  <a:tcPr/>
+                </a:tc>
+                <a:tc>
+                  <a:txBody>
+                    <a:bodyPr/>
+                    <a:lstStyle/>
+                    <a:p>
+                      <a:r>
+                        <a:rPr sz="1100"/>
+                        <a:t>Month 24–30</a:t>
+                      </a:r>
+                    </a:p>
+                  </a:txBody>
+                  <a:tcPr/>
+                </a:tc>
+                <a:tc>
+                  <a:txBody>
+                    <a:bodyPr/>
+                    <a:lstStyle/>
+                    <a:p>
+                      <a:r>
+                        <a:rPr sz="1100"/>
+                        <a:t>Mix of ~50 B2B tenants and ~1k B2C Pro</a:t>
+                      </a:r>
+                    </a:p>
+                  </a:txBody>
+                  <a:tcPr/>
+                </a:tc>
+                <a:tc>
+                  <a:txBody>
+                    <a:bodyPr/>
+                    <a:lstStyle/>
+                    <a:p/>
+                  </a:txBody>
+                  <a:tcPr/>
+                </a:tc>
+                <a:tc>
+                  <a:txBody>
+                    <a:bodyPr/>
+                    <a:lstStyle/>
+                    <a:p/>
+                  </a:txBody>
+                  <a:tcPr/>
+                </a:tc>
+              </a:tr>
+              <a:tr h="411480">
+                <a:tc>
+                  <a:txBody>
+                    <a:bodyPr/>
+                    <a:lstStyle/>
+                    <a:p>
+                      <a:r>
+                        <a:rPr sz="1100"/>
+                        <a:t>L2-Kirkpatrick proof: \</a:t>
+                      </a:r>
+                    </a:p>
+                  </a:txBody>
+                  <a:tcPr/>
+                </a:tc>
+                <a:tc>
+                  <a:txBody>
+                    <a:bodyPr/>
+                    <a:lstStyle/>
+                    <a:p>
+                      <a:r>
+                        <a:rPr sz="1100"/>
+                        <a:t>calibration Δ\</a:t>
+                      </a:r>
+                    </a:p>
+                  </a:txBody>
+                  <a:tcPr/>
+                </a:tc>
+                <a:tc>
+                  <a:txBody>
+                    <a:bodyPr/>
+                    <a:lstStyle/>
+                    <a:p>
+                      <a:r>
+                        <a:rPr sz="1100"/>
+                        <a:t>≤ 0.5 on shipped cohorts</a:t>
+                      </a:r>
+                    </a:p>
+                  </a:txBody>
+                  <a:tcPr/>
+                </a:tc>
+                <a:tc>
+                  <a:txBody>
+                    <a:bodyPr/>
+                    <a:lstStyle/>
+                    <a:p>
+                      <a:r>
+                        <a:rPr sz="1100"/>
+                        <a:t>Month 12+</a:t>
+                      </a:r>
+                    </a:p>
+                  </a:txBody>
+                  <a:tcPr/>
+                </a:tc>
+                <a:tc>
+                  <a:txBody>
+                    <a:bodyPr/>
+                    <a:lstStyle/>
+                    <a:p>
+                      <a:r>
+                        <a:rPr sz="1100"/>
+                        <a:t>The pedagogical claim becomes testable, not aspirational</a:t>
+                      </a:r>
+                    </a:p>
+                  </a:txBody>
+                  <a:tcPr/>
+                </a:tc>
+              </a:tr>
+            </a:tbl>
+          </a:graphicData>
+        </a:graphic>
+      </p:graphicFrame>
+    </p:spTree>
+  </p:cSld>
+  <p:clrMapOvr>
+    <a:masterClrMapping/>
+  </p:clrMapOvr>
+</p:sld>
+</file>
+
+<file path=ppt/slides/slide2.xml><?xml version="1.0" encoding="utf-8"?>
+<p:sld xmlns:a="http://schemas.openxmlformats.org/drawingml/2006/main" xmlns:p="http://schemas.openxmlformats.org/presentationml/2006/main" xmlns:r="http://schemas.openxmlformats.org/officeDocument/2006/relationships">
+  <p:cSld>
+    <p:spTree>
+      <p:nvGrpSpPr>
+        <p:cNvPr id="1" name=""/>
+        <p:cNvGrpSpPr/>
+        <p:nvPr/>
+      </p:nvGrpSpPr>
+      <p:grpSpPr/>
+      <p:sp>
+        <p:nvSpPr>
+          <p:cNvPr id="2" name="TextBox 1"/>
+          <p:cNvSpPr txBox="1"/>
+          <p:nvPr/>
+        </p:nvSpPr>
+        <p:spPr>
+          <a:xfrm>
+            <a:off x="457200" y="274320"/>
+            <a:ext cx="11247120" cy="914400"/>
+          </a:xfrm>
+          <a:prstGeom prst="rect">
+            <a:avLst/>
+          </a:prstGeom>
+          <a:noFill/>
+        </p:spPr>
+        <p:txBody>
+          <a:bodyPr wrap="square">
+            <a:spAutoFit/>
+          </a:bodyPr>
+          <a:lstStyle/>
+          <a:p>
+            <a:pPr algn="l"/>
+            <a:r>
+              <a:rPr sz="2800" b="1">
+                <a:solidFill>
+                  <a:srgbClr val="1A1A2E"/>
+                </a:solidFill>
+              </a:rPr>
+              <a:t>Content Pack Management Platform</a:t>
+            </a:r>
+          </a:p>
+        </p:txBody>
+      </p:sp>
+      <p:sp>
+        <p:nvSpPr>
+          <p:cNvPr id="3" name="TextBox 2"/>
+          <p:cNvSpPr txBox="1"/>
+          <p:nvPr/>
+        </p:nvSpPr>
+        <p:spPr>
+          <a:xfrm>
+            <a:off x="457200" y="1280160"/>
+            <a:ext cx="11247120" cy="5303520"/>
+          </a:xfrm>
+          <a:prstGeom prst="rect">
+            <a:avLst/>
+          </a:prstGeom>
+          <a:noFill/>
+        </p:spPr>
+        <p:txBody>
+          <a:bodyPr wrap="square">
+            <a:spAutoFit/>
+          </a:bodyPr>
+          <a:lstStyle/>
+          <a:p>
+            <a:pPr algn="l">
+              <a:spcAft>
+                <a:spcPts val="800"/>
+              </a:spcAft>
+            </a:pPr>
+            <a:r>
+              <a:rPr sz="1800"/>
+              <a:t>A capital-efficient path to a vertical learning platform. Validated revenue intent before any AI cost is spent.</a:t>
+            </a:r>
+          </a:p>
+          <a:p>
+            <a:pPr algn="l">
+              <a:spcAft>
+                <a:spcPts val="800"/>
+              </a:spcAft>
+            </a:pPr>
+            <a:r>
+              <a:rPr sz="1800"/>
+              <a:t>Stage: pre-launch • Operator: solo, hands-on • Built on existing CCA-F study repo</a:t>
+            </a:r>
+          </a:p>
+        </p:txBody>
+      </p:sp>
+    </p:spTree>
+  </p:cSld>
+  <p:clrMapOvr>
+    <a:masterClrMapping/>
+  </p:clrMapOvr>
+</p:sld>
+</file>
+
+<file path=ppt/slides/slide20.xml><?xml version="1.0" encoding="utf-8"?>
+<p:sld xmlns:a="http://schemas.openxmlformats.org/drawingml/2006/main" xmlns:p="http://schemas.openxmlformats.org/presentationml/2006/main" xmlns:r="http://schemas.openxmlformats.org/officeDocument/2006/relationships">
+  <p:cSld>
+    <p:spTree>
+      <p:nvGrpSpPr>
+        <p:cNvPr id="1" name=""/>
+        <p:cNvGrpSpPr/>
+        <p:nvPr/>
+      </p:nvGrpSpPr>
+      <p:grpSpPr/>
+      <p:sp>
+        <p:nvSpPr>
+          <p:cNvPr id="2" name="TextBox 1"/>
+          <p:cNvSpPr txBox="1"/>
+          <p:nvPr/>
+        </p:nvSpPr>
+        <p:spPr>
+          <a:xfrm>
+            <a:off x="457200" y="274320"/>
+            <a:ext cx="11247120" cy="914400"/>
+          </a:xfrm>
+          <a:prstGeom prst="rect">
+            <a:avLst/>
+          </a:prstGeom>
+          <a:noFill/>
+        </p:spPr>
+        <p:txBody>
+          <a:bodyPr wrap="square">
+            <a:spAutoFit/>
+          </a:bodyPr>
+          <a:lstStyle/>
+          <a:p>
+            <a:pPr algn="l"/>
+            <a:r>
+              <a:rPr sz="2800" b="1">
+                <a:solidFill>
+                  <a:srgbClr val="1A1A2E"/>
+                </a:solidFill>
+              </a:rPr>
               <a:t>Risks the investor should evaluate</a:t>
             </a:r>
           </a:p>
@@ -4927,7 +6694,7 @@
 </p:sld>
 </file>
 
-<file path=ppt/slides/slide17.xml><?xml version="1.0" encoding="utf-8"?>
+<file path=ppt/slides/slide21.xml><?xml version="1.0" encoding="utf-8"?>
 <p:sld xmlns:a="http://schemas.openxmlformats.org/drawingml/2006/main" xmlns:p="http://schemas.openxmlformats.org/presentationml/2006/main" xmlns:r="http://schemas.openxmlformats.org/officeDocument/2006/relationships">
   <p:cSld>
     <p:spTree>
@@ -5056,7 +6823,7 @@
 </p:sld>
 </file>
 
-<file path=ppt/slides/slide18.xml><?xml version="1.0" encoding="utf-8"?>
+<file path=ppt/slides/slide22.xml><?xml version="1.0" encoding="utf-8"?>
 <p:sld xmlns:a="http://schemas.openxmlformats.org/drawingml/2006/main" xmlns:p="http://schemas.openxmlformats.org/presentationml/2006/main" xmlns:r="http://schemas.openxmlformats.org/officeDocument/2006/relationships">
   <p:cSld>
     <p:spTree>
@@ -5146,7 +6913,7 @@
 </p:sld>
 </file>
 
-<file path=ppt/slides/slide19.xml><?xml version="1.0" encoding="utf-8"?>
+<file path=ppt/slides/slide23.xml><?xml version="1.0" encoding="utf-8"?>
 <p:sld xmlns:a="http://schemas.openxmlformats.org/drawingml/2006/main" xmlns:p="http://schemas.openxmlformats.org/presentationml/2006/main" xmlns:r="http://schemas.openxmlformats.org/officeDocument/2006/relationships">
   <p:cSld>
     <p:spTree>
@@ -5248,103 +7015,6 @@
             <a:r>
               <a:rPr sz="1600"/>
               <a:t>Detailed plan: ./content-pack-management-plan.md.</a:t>
-            </a:r>
-          </a:p>
-        </p:txBody>
-      </p:sp>
-    </p:spTree>
-  </p:cSld>
-  <p:clrMapOvr>
-    <a:masterClrMapping/>
-  </p:clrMapOvr>
-</p:sld>
-</file>
-
-<file path=ppt/slides/slide2.xml><?xml version="1.0" encoding="utf-8"?>
-<p:sld xmlns:a="http://schemas.openxmlformats.org/drawingml/2006/main" xmlns:p="http://schemas.openxmlformats.org/presentationml/2006/main" xmlns:r="http://schemas.openxmlformats.org/officeDocument/2006/relationships">
-  <p:cSld>
-    <p:spTree>
-      <p:nvGrpSpPr>
-        <p:cNvPr id="1" name=""/>
-        <p:cNvGrpSpPr/>
-        <p:nvPr/>
-      </p:nvGrpSpPr>
-      <p:grpSpPr/>
-      <p:sp>
-        <p:nvSpPr>
-          <p:cNvPr id="2" name="TextBox 1"/>
-          <p:cNvSpPr txBox="1"/>
-          <p:nvPr/>
-        </p:nvSpPr>
-        <p:spPr>
-          <a:xfrm>
-            <a:off x="457200" y="274320"/>
-            <a:ext cx="11247120" cy="914400"/>
-          </a:xfrm>
-          <a:prstGeom prst="rect">
-            <a:avLst/>
-          </a:prstGeom>
-          <a:noFill/>
-        </p:spPr>
-        <p:txBody>
-          <a:bodyPr wrap="square">
-            <a:spAutoFit/>
-          </a:bodyPr>
-          <a:lstStyle/>
-          <a:p>
-            <a:pPr algn="l"/>
-            <a:r>
-              <a:rPr sz="2800" b="1">
-                <a:solidFill>
-                  <a:srgbClr val="1A1A2E"/>
-                </a:solidFill>
-              </a:rPr>
-              <a:t>Content Pack Management Platform</a:t>
-            </a:r>
-          </a:p>
-        </p:txBody>
-      </p:sp>
-      <p:sp>
-        <p:nvSpPr>
-          <p:cNvPr id="3" name="TextBox 2"/>
-          <p:cNvSpPr txBox="1"/>
-          <p:nvPr/>
-        </p:nvSpPr>
-        <p:spPr>
-          <a:xfrm>
-            <a:off x="457200" y="1280160"/>
-            <a:ext cx="11247120" cy="5303520"/>
-          </a:xfrm>
-          <a:prstGeom prst="rect">
-            <a:avLst/>
-          </a:prstGeom>
-          <a:noFill/>
-        </p:spPr>
-        <p:txBody>
-          <a:bodyPr wrap="square">
-            <a:spAutoFit/>
-          </a:bodyPr>
-          <a:lstStyle/>
-          <a:p>
-            <a:pPr algn="l">
-              <a:spcAft>
-                <a:spcPts val="800"/>
-              </a:spcAft>
-            </a:pPr>
-            <a:r>
-              <a:rPr sz="1800"/>
-              <a:t>A capital-efficient path to a vertical learning platform. Validated revenue intent before any AI cost is spent.</a:t>
-            </a:r>
-          </a:p>
-          <a:p>
-            <a:pPr algn="l">
-              <a:spcAft>
-                <a:spcPts val="800"/>
-              </a:spcAft>
-            </a:pPr>
-            <a:r>
-              <a:rPr sz="1800"/>
-              <a:t>Stage: pre-launch • Operator: solo, hands-on • Built on existing CCA-F study repo</a:t>
             </a:r>
           </a:p>
         </p:txBody>
@@ -6179,6 +7849,28 @@
             <a:r>
               <a:rPr sz="1600"/>
               <a:t>CAC payback: B2C ~3 months at $9/mo and ~$25 CAC; B2B varies by deal size, target &lt; 12 months.</a:t>
+            </a:r>
+          </a:p>
+          <a:p>
+            <a:pPr>
+              <a:spcAft>
+                <a:spcPts val="600"/>
+              </a:spcAft>
+            </a:pPr>
+            <a:r>
+              <a:rPr sz="1600"/>
+              <a:t>NRR target: Year 1 ≥ 110% (median+, SaaS Capital 2025 benchmark);</a:t>
+            </a:r>
+          </a:p>
+          <a:p>
+            <a:pPr algn="l">
+              <a:spcAft>
+                <a:spcPts val="800"/>
+              </a:spcAft>
+            </a:pPr>
+            <a:r>
+              <a:rPr sz="1800"/>
+              <a:t>Year 2 ≥ 120% (top-quartile). The pedagogical moat (LM1–LM8) is also the expansion-revenue moat — cohort outcomes drive seat-expansion and multi-pack adoption.</a:t>
             </a:r>
           </a:p>
           <a:p>

--- a/plans/deck-investor.pptx
+++ b/plans/deck-investor.pptx
@@ -28,6 +28,7 @@
     <p:sldId id="276" r:id="rId27"/>
     <p:sldId id="277" r:id="rId28"/>
     <p:sldId id="278" r:id="rId29"/>
+    <p:sldId id="279" r:id="rId30"/>
   </p:sldIdLst>
   <p:sldSz cx="12191695" cy="6858000" type="screen4x3"/>
   <p:notesSz cx="6858000" cy="9144000"/>
@@ -5602,7 +5603,7 @@
                   <a:srgbClr val="1A1A2E"/>
                 </a:solidFill>
               </a:rPr>
-              <a:t>Founder fit</a:t>
+              <a:t>Problems → product mitigation (the LP-level audit)</a:t>
             </a:r>
           </a:p>
         </p:txBody>
@@ -5629,39 +5630,490 @@
           </a:bodyPr>
           <a:lstStyle/>
           <a:p>
-            <a:pPr/>
-            <a:r>
-              <a:rPr sz="1600"/>
-              <a:t>Senior developer (15+ years), structured-thinking-strong (ABAP background — schema and process discipline).</a:t>
-            </a:r>
-          </a:p>
-          <a:p>
-            <a:pPr/>
-            <a:r>
-              <a:rPr sz="1600"/>
-              <a:t>Building from a real artifact: a personal CCA-F study repo with mock exams, error-log analytics, and the failure-mode taxonomy that becomes the platform's moat.</a:t>
-            </a:r>
-          </a:p>
-          <a:p>
-            <a:pPr/>
-            <a:r>
-              <a:rPr sz="1600"/>
-              <a:t>Hands-on operator profile — comfortable doing all four of: write code, write content, write copy, talk to customers.</a:t>
-            </a:r>
-          </a:p>
-          <a:p>
-            <a:pPr>
+            <a:pPr algn="l">
               <a:spcAft>
-                <a:spcPts val="600"/>
+                <a:spcPts val="800"/>
               </a:spcAft>
             </a:pPr>
             <a:r>
-              <a:rPr sz="1600"/>
-              <a:t>Day job is unrelated; this is a side bet, not a stake-everything-on-it situation. Right shape for capital-efficient validation, wrong shape for "fund-the-team-of-12."</a:t>
-            </a:r>
-          </a:p>
-        </p:txBody>
-      </p:sp>
+              <a:rPr sz="1800"/>
+              <a:t>The pattern an investor should look for: every retention or absorption problem is mitigated by a specific, shipped feature with a named research source — not by exhortation, not by "we'll figure it out," not by founder-charisma. This is the audit.</a:t>
+            </a:r>
+          </a:p>
+          <a:p>
+            <a:pPr algn="l">
+              <a:spcAft>
+                <a:spcPts val="800"/>
+              </a:spcAft>
+            </a:pPr>
+            <a:r>
+              <a:rPr sz="1800"/>
+              <a:t>The moat is the matrix. Anyone can build an AI tutor. The defensibility is the named-mechanism → shipped-feature → falsifiable-metric chain — and the willingness to be measured against L1–L4 Kirkpatrick targets in §D4 of the build plan.</a:t>
+            </a:r>
+          </a:p>
+        </p:txBody>
+      </p:sp>
+      <p:graphicFrame>
+        <p:nvGraphicFramePr>
+          <p:cNvPr id="4" name="Table 3"/>
+          <p:cNvGraphicFramePr>
+            <a:graphicFrameLocks noGrp="1"/>
+          </p:cNvGraphicFramePr>
+          <p:nvPr/>
+        </p:nvGraphicFramePr>
+        <p:xfrm>
+          <a:off x="457200" y="2240280"/>
+          <a:ext cx="11247120" cy="4114800"/>
+        </p:xfrm>
+        <a:graphic>
+          <a:graphicData uri="http://schemas.openxmlformats.org/drawingml/2006/table">
+            <a:tbl>
+              <a:tblPr firstRow="1" bandRow="1">
+                <a:tableStyleId>{5C22544A-7EE6-4342-B048-85BDC9FD1C3A}</a:tableStyleId>
+              </a:tblPr>
+              <a:tblGrid>
+                <a:gridCol w="3749040"/>
+                <a:gridCol w="3749040"/>
+                <a:gridCol w="3749040"/>
+              </a:tblGrid>
+              <a:tr h="411480">
+                <a:tc>
+                  <a:txBody>
+                    <a:bodyPr/>
+                    <a:lstStyle/>
+                    <a:p>
+                      <a:r>
+                        <a:rPr sz="1100" b="1">
+                          <a:solidFill>
+                            <a:srgbClr val="FFFFFF"/>
+                          </a:solidFill>
+                        </a:rPr>
+                        <a:t>Problem identified</a:t>
+                      </a:r>
+                    </a:p>
+                  </a:txBody>
+                  <a:tcPr>
+                    <a:solidFill>
+                      <a:srgbClr val="1A1A2E"/>
+                    </a:solidFill>
+                  </a:tcPr>
+                </a:tc>
+                <a:tc>
+                  <a:txBody>
+                    <a:bodyPr/>
+                    <a:lstStyle/>
+                    <a:p>
+                      <a:r>
+                        <a:rPr sz="1100" b="1">
+                          <a:solidFill>
+                            <a:srgbClr val="FFFFFF"/>
+                          </a:solidFill>
+                        </a:rPr>
+                        <a:t>Platform feature mitigating it</a:t>
+                      </a:r>
+                    </a:p>
+                  </a:txBody>
+                  <a:tcPr>
+                    <a:solidFill>
+                      <a:srgbClr val="1A1A2E"/>
+                    </a:solidFill>
+                  </a:tcPr>
+                </a:tc>
+                <a:tc>
+                  <a:txBody>
+                    <a:bodyPr/>
+                    <a:lstStyle/>
+                    <a:p>
+                      <a:r>
+                        <a:rPr sz="1100" b="1">
+                          <a:solidFill>
+                            <a:srgbClr val="FFFFFF"/>
+                          </a:solidFill>
+                        </a:rPr>
+                        <a:t>Cited source</a:t>
+                      </a:r>
+                    </a:p>
+                  </a:txBody>
+                  <a:tcPr>
+                    <a:solidFill>
+                      <a:srgbClr val="1A1A2E"/>
+                    </a:solidFill>
+                  </a:tcPr>
+                </a:tc>
+              </a:tr>
+              <a:tr h="411480">
+                <a:tc>
+                  <a:txBody>
+                    <a:bodyPr/>
+                    <a:lstStyle/>
+                    <a:p>
+                      <a:r>
+                        <a:rPr sz="1100"/>
+                        <a:t>Knowledge decays exponentially without review</a:t>
+                      </a:r>
+                    </a:p>
+                  </a:txBody>
+                  <a:tcPr/>
+                </a:tc>
+                <a:tc>
+                  <a:txBody>
+                    <a:bodyPr/>
+                    <a:lstStyle/>
+                    <a:p>
+                      <a:r>
+                        <a:rPr sz="1100"/>
+                        <a:t>Spaced-review banner on the learner dashboard (one-tap start); expanding interval 1/3/7/14/30d</a:t>
+                      </a:r>
+                    </a:p>
+                  </a:txBody>
+                  <a:tcPr/>
+                </a:tc>
+                <a:tc>
+                  <a:txBody>
+                    <a:bodyPr/>
+                    <a:lstStyle/>
+                    <a:p>
+                      <a:r>
+                        <a:rPr sz="1100"/>
+                        <a:t>Cepeda 2008 Psych Sci; Murre &amp; Dros 2015</a:t>
+                      </a:r>
+                    </a:p>
+                  </a:txBody>
+                  <a:tcPr/>
+                </a:tc>
+              </a:tr>
+              <a:tr h="411480">
+                <a:tc>
+                  <a:txBody>
+                    <a:bodyPr/>
+                    <a:lstStyle/>
+                    <a:p>
+                      <a:r>
+                        <a:rPr sz="1100"/>
+                        <a:t>Re-reading produces fluency illusion (high JOL, low recall)</a:t>
+                      </a:r>
+                    </a:p>
+                  </a:txBody>
+                  <a:tcPr/>
+                </a:tc>
+                <a:tc>
+                  <a:txBody>
+                    <a:bodyPr/>
+                    <a:lstStyle/>
+                    <a:p>
+                      <a:r>
+                        <a:rPr sz="1100"/>
+                        <a:t>Mid-lesson retrieval gate; write-the-principle before reveal</a:t>
+                      </a:r>
+                    </a:p>
+                  </a:txBody>
+                  <a:tcPr/>
+                </a:tc>
+                <a:tc>
+                  <a:txBody>
+                    <a:bodyPr/>
+                    <a:lstStyle/>
+                    <a:p>
+                      <a:r>
+                        <a:rPr sz="1100"/>
+                        <a:t>Roediger &amp; Karpicke 2006; Slamecka &amp; Graf 1978</a:t>
+                      </a:r>
+                    </a:p>
+                  </a:txBody>
+                  <a:tcPr/>
+                </a:tc>
+              </a:tr>
+              <a:tr h="411480">
+                <a:tc>
+                  <a:txBody>
+                    <a:bodyPr/>
+                    <a:lstStyle/>
+                    <a:p>
+                      <a:r>
+                        <a:rPr sz="1100"/>
+                        <a:t>Streaks computed but no return-trigger</a:t>
+                      </a:r>
+                    </a:p>
+                  </a:txBody>
+                  <a:tcPr/>
+                </a:tc>
+                <a:tc>
+                  <a:txBody>
+                    <a:bodyPr/>
+                    <a:lstStyle/>
+                    <a:p>
+                      <a:r>
+                        <a:rPr sz="1100"/>
+                        <a:t>Web-push at user's modal study-time; streak-freeze; email digest fallback</a:t>
+                      </a:r>
+                    </a:p>
+                  </a:txBody>
+                  <a:tcPr/>
+                </a:tc>
+                <a:tc>
+                  <a:txBody>
+                    <a:bodyPr/>
+                    <a:lstStyle/>
+                    <a:p>
+                      <a:r>
+                        <a:rPr sz="1100"/>
+                        <a:t>Eyal 2014 (Hook Model); Mazal 2022 (Duolingo CURR +21%, DAU 4.5×)</a:t>
+                      </a:r>
+                    </a:p>
+                  </a:txBody>
+                  <a:tcPr/>
+                </a:tc>
+              </a:tr>
+              <a:tr h="411480">
+                <a:tc>
+                  <a:txBody>
+                    <a:bodyPr/>
+                    <a:lstStyle/>
+                    <a:p>
+                      <a:r>
+                        <a:rPr sz="1100"/>
+                        <a:t>MOOC completion 3–10% — no relatedness surface</a:t>
+                      </a:r>
+                    </a:p>
+                  </a:txBody>
+                  <a:tcPr/>
+                </a:tc>
+                <a:tc>
+                  <a:txBody>
+                    <a:bodyPr/>
+                    <a:lstStyle/>
+                    <a:p>
+                      <a:r>
+                        <a:rPr sz="1100"/>
+                        <a:t>Per-cohort routes, peer-comparison, group leaderboard</a:t>
+                      </a:r>
+                    </a:p>
+                  </a:txBody>
+                  <a:tcPr/>
+                </a:tc>
+                <a:tc>
+                  <a:txBody>
+                    <a:bodyPr/>
+                    <a:lstStyle/>
+                    <a:p>
+                      <a:r>
+                        <a:rPr sz="1100"/>
+                        <a:t>Ryan &amp; Deci (SDT); Maven W1→W2 96% (14× MOOC)</a:t>
+                      </a:r>
+                    </a:p>
+                  </a:txBody>
+                  <a:tcPr/>
+                </a:tc>
+              </a:tr>
+              <a:tr h="411480">
+                <a:tc>
+                  <a:txBody>
+                    <a:bodyPr/>
+                    <a:lstStyle/>
+                    <a:p>
+                      <a:r>
+                        <a:rPr sz="1100"/>
+                        <a:t>Calibration not captured — Dunning-Kruger gap invisible</a:t>
+                      </a:r>
+                    </a:p>
+                  </a:txBody>
+                  <a:tcPr/>
+                </a:tc>
+                <a:tc>
+                  <a:txBody>
+                    <a:bodyPr/>
+                    <a:lstStyle/>
+                    <a:p>
+                      <a:r>
+                        <a:rPr sz="1100"/>
+                        <a:t>JOL slider + calibration-Δ trend in stats panel</a:t>
+                      </a:r>
+                    </a:p>
+                  </a:txBody>
+                  <a:tcPr/>
+                </a:tc>
+                <a:tc>
+                  <a:txBody>
+                    <a:bodyPr/>
+                    <a:lstStyle/>
+                    <a:p>
+                      <a:r>
+                        <a:rPr sz="1100"/>
+                        <a:t>Dunlosky &amp; Bjork; Kruger &amp; Dunning 1999</a:t>
+                      </a:r>
+                    </a:p>
+                  </a:txBody>
+                  <a:tcPr/>
+                </a:tc>
+              </a:tr>
+              <a:tr h="411480">
+                <a:tc>
+                  <a:txBody>
+                    <a:bodyPr/>
+                    <a:lstStyle/>
+                    <a:p>
+                      <a:r>
+                        <a:rPr sz="1100"/>
+                        <a:t>SMEs omit ~70% of decisions self-narrating</a:t>
+                      </a:r>
+                    </a:p>
+                  </a:txBody>
+                  <a:tcPr/>
+                </a:tc>
+                <a:tc>
+                  <a:txBody>
+                    <a:bodyPr/>
+                    <a:lstStyle/>
+                    <a:p>
+                      <a:r>
+                        <a:rPr sz="1100"/>
+                        <a:t>5-probe CTA DrafterIntake schema; admin app blocks publish if any field empty</a:t>
+                      </a:r>
+                    </a:p>
+                  </a:txBody>
+                  <a:tcPr/>
+                </a:tc>
+                <a:tc>
+                  <a:txBody>
+                    <a:bodyPr/>
+                    <a:lstStyle/>
+                    <a:p>
+                      <a:r>
+                        <a:rPr sz="1100"/>
+                        <a:t>Clark / Feldon; Lee 2004 (+46% learning gain, d ≈ 1.72)</a:t>
+                      </a:r>
+                    </a:p>
+                  </a:txBody>
+                  <a:tcPr/>
+                </a:tc>
+              </a:tr>
+              <a:tr h="411480">
+                <a:tc>
+                  <a:txBody>
+                    <a:bodyPr/>
+                    <a:lstStyle/>
+                    <a:p>
+                      <a:r>
+                        <a:rPr sz="1100"/>
+                        <a:t>Curse of expertise — bridging steps under-explained</a:t>
+                      </a:r>
+                    </a:p>
+                  </a:txBody>
+                  <a:tcPr/>
+                </a:tc>
+                <a:tc>
+                  <a:txBody>
+                    <a:bodyPr/>
+                    <a:lstStyle/>
+                    <a:p>
+                      <a:r>
+                        <a:rPr sz="1100"/>
+                        <a:t>"Novice-error" probe required at submit; critic surfaces blind-spot flags</a:t>
+                      </a:r>
+                    </a:p>
+                  </a:txBody>
+                  <a:tcPr/>
+                </a:tc>
+                <a:tc>
+                  <a:txBody>
+                    <a:bodyPr/>
+                    <a:lstStyle/>
+                    <a:p>
+                      <a:r>
+                        <a:rPr sz="1100"/>
+                        <a:t>Nathan &amp; Petrosino 2003</a:t>
+                      </a:r>
+                    </a:p>
+                  </a:txBody>
+                  <a:tcPr/>
+                </a:tc>
+              </a:tr>
+              <a:tr h="411480">
+                <a:tc>
+                  <a:txBody>
+                    <a:bodyPr/>
+                    <a:lstStyle/>
+                    <a:p>
+                      <a:r>
+                        <a:rPr sz="1100"/>
+                        <a:t>Tacit knowledge unrecoverable from text-from-blank (deskless / shop-floor)</a:t>
+                      </a:r>
+                    </a:p>
+                  </a:txBody>
+                  <a:tcPr/>
+                </a:tc>
+                <a:tc>
+                  <a:txBody>
+                    <a:bodyPr/>
+                    <a:lstStyle/>
+                    <a:p>
+                      <a:r>
+                        <a:rPr sz="1100"/>
+                        <a:t>Voice-first / camera-first authoring + auto-draft into 5-probe intake</a:t>
+                      </a:r>
+                    </a:p>
+                  </a:txBody>
+                  <a:tcPr/>
+                </a:tc>
+                <a:tc>
+                  <a:txBody>
+                    <a:bodyPr/>
+                    <a:lstStyle/>
+                    <a:p>
+                      <a:r>
+                        <a:rPr sz="1100"/>
+                        <a:t>Polanyi 1966; TalentCards (~2.7B deskless)</a:t>
+                      </a:r>
+                    </a:p>
+                  </a:txBody>
+                  <a:tcPr/>
+                </a:tc>
+              </a:tr>
+              <a:tr h="411480">
+                <a:tc>
+                  <a:txBody>
+                    <a:bodyPr/>
+                    <a:lstStyle/>
+                    <a:p>
+                      <a:r>
+                        <a:rPr sz="1100"/>
+                        <a:t>Critic feedback no loop — SME never improves</a:t>
+                      </a:r>
+                    </a:p>
+                  </a:txBody>
+                  <a:tcPr/>
+                </a:tc>
+                <a:tc>
+                  <a:txBody>
+                    <a:bodyPr/>
+                    <a:lstStyle/>
+                    <a:p>
+                      <a:r>
+                        <a:rPr sz="1100"/>
+                        <a:t>Per-SME blind-spot dashboard + personalised authoring prompts</a:t>
+                      </a:r>
+                    </a:p>
+                  </a:txBody>
+                  <a:tcPr/>
+                </a:tc>
+                <a:tc>
+                  <a:txBody>
+                    <a:bodyPr/>
+                    <a:lstStyle/>
+                    <a:p>
+                      <a:r>
+                        <a:rPr sz="1100"/>
+                        <a:t>Ericsson 1993 (deliberate-practice feedback channel)</a:t>
+                      </a:r>
+                    </a:p>
+                  </a:txBody>
+                  <a:tcPr/>
+                </a:tc>
+              </a:tr>
+            </a:tbl>
+          </a:graphicData>
+        </a:graphic>
+      </p:graphicFrame>
     </p:spTree>
   </p:cSld>
   <p:clrMapOvr>
@@ -5671,6 +6123,210 @@
 </file>
 
 <file path=ppt/slides/slide19.xml><?xml version="1.0" encoding="utf-8"?>
+<p:sld xmlns:a="http://schemas.openxmlformats.org/drawingml/2006/main" xmlns:p="http://schemas.openxmlformats.org/presentationml/2006/main" xmlns:r="http://schemas.openxmlformats.org/officeDocument/2006/relationships">
+  <p:cSld>
+    <p:spTree>
+      <p:nvGrpSpPr>
+        <p:cNvPr id="1" name=""/>
+        <p:cNvGrpSpPr/>
+        <p:nvPr/>
+      </p:nvGrpSpPr>
+      <p:grpSpPr/>
+      <p:sp>
+        <p:nvSpPr>
+          <p:cNvPr id="2" name="TextBox 1"/>
+          <p:cNvSpPr txBox="1"/>
+          <p:nvPr/>
+        </p:nvSpPr>
+        <p:spPr>
+          <a:xfrm>
+            <a:off x="457200" y="274320"/>
+            <a:ext cx="11247120" cy="914400"/>
+          </a:xfrm>
+          <a:prstGeom prst="rect">
+            <a:avLst/>
+          </a:prstGeom>
+          <a:noFill/>
+        </p:spPr>
+        <p:txBody>
+          <a:bodyPr wrap="square">
+            <a:spAutoFit/>
+          </a:bodyPr>
+          <a:lstStyle/>
+          <a:p>
+            <a:pPr algn="l"/>
+            <a:r>
+              <a:rPr sz="2800" b="1">
+                <a:solidFill>
+                  <a:srgbClr val="1A1A2E"/>
+                </a:solidFill>
+              </a:rPr>
+              <a:t>Founder fit</a:t>
+            </a:r>
+          </a:p>
+        </p:txBody>
+      </p:sp>
+      <p:sp>
+        <p:nvSpPr>
+          <p:cNvPr id="3" name="TextBox 2"/>
+          <p:cNvSpPr txBox="1"/>
+          <p:nvPr/>
+        </p:nvSpPr>
+        <p:spPr>
+          <a:xfrm>
+            <a:off x="457200" y="1280160"/>
+            <a:ext cx="11247120" cy="5303520"/>
+          </a:xfrm>
+          <a:prstGeom prst="rect">
+            <a:avLst/>
+          </a:prstGeom>
+          <a:noFill/>
+        </p:spPr>
+        <p:txBody>
+          <a:bodyPr wrap="square">
+            <a:spAutoFit/>
+          </a:bodyPr>
+          <a:lstStyle/>
+          <a:p>
+            <a:pPr/>
+            <a:r>
+              <a:rPr sz="1600"/>
+              <a:t>Senior developer (15+ years), structured-thinking-strong (ABAP background — schema and process discipline).</a:t>
+            </a:r>
+          </a:p>
+          <a:p>
+            <a:pPr/>
+            <a:r>
+              <a:rPr sz="1600"/>
+              <a:t>Building from a real artifact: a personal CCA-F study repo with mock exams, error-log analytics, and the failure-mode taxonomy that becomes the platform's moat.</a:t>
+            </a:r>
+          </a:p>
+          <a:p>
+            <a:pPr/>
+            <a:r>
+              <a:rPr sz="1600"/>
+              <a:t>Hands-on operator profile — comfortable doing all four of: write code, write content, write copy, talk to customers.</a:t>
+            </a:r>
+          </a:p>
+          <a:p>
+            <a:pPr>
+              <a:spcAft>
+                <a:spcPts val="600"/>
+              </a:spcAft>
+            </a:pPr>
+            <a:r>
+              <a:rPr sz="1600"/>
+              <a:t>Day job is unrelated; this is a side bet, not a stake-everything-on-it situation. Right shape for capital-efficient validation, wrong shape for "fund-the-team-of-12."</a:t>
+            </a:r>
+          </a:p>
+        </p:txBody>
+      </p:sp>
+    </p:spTree>
+  </p:cSld>
+  <p:clrMapOvr>
+    <a:masterClrMapping/>
+  </p:clrMapOvr>
+</p:sld>
+</file>
+
+<file path=ppt/slides/slide2.xml><?xml version="1.0" encoding="utf-8"?>
+<p:sld xmlns:a="http://schemas.openxmlformats.org/drawingml/2006/main" xmlns:p="http://schemas.openxmlformats.org/presentationml/2006/main" xmlns:r="http://schemas.openxmlformats.org/officeDocument/2006/relationships">
+  <p:cSld>
+    <p:spTree>
+      <p:nvGrpSpPr>
+        <p:cNvPr id="1" name=""/>
+        <p:cNvGrpSpPr/>
+        <p:nvPr/>
+      </p:nvGrpSpPr>
+      <p:grpSpPr/>
+      <p:sp>
+        <p:nvSpPr>
+          <p:cNvPr id="2" name="TextBox 1"/>
+          <p:cNvSpPr txBox="1"/>
+          <p:nvPr/>
+        </p:nvSpPr>
+        <p:spPr>
+          <a:xfrm>
+            <a:off x="457200" y="274320"/>
+            <a:ext cx="11247120" cy="914400"/>
+          </a:xfrm>
+          <a:prstGeom prst="rect">
+            <a:avLst/>
+          </a:prstGeom>
+          <a:noFill/>
+        </p:spPr>
+        <p:txBody>
+          <a:bodyPr wrap="square">
+            <a:spAutoFit/>
+          </a:bodyPr>
+          <a:lstStyle/>
+          <a:p>
+            <a:pPr algn="l"/>
+            <a:r>
+              <a:rPr sz="2800" b="1">
+                <a:solidFill>
+                  <a:srgbClr val="1A1A2E"/>
+                </a:solidFill>
+              </a:rPr>
+              <a:t>Content Pack Management Platform</a:t>
+            </a:r>
+          </a:p>
+        </p:txBody>
+      </p:sp>
+      <p:sp>
+        <p:nvSpPr>
+          <p:cNvPr id="3" name="TextBox 2"/>
+          <p:cNvSpPr txBox="1"/>
+          <p:nvPr/>
+        </p:nvSpPr>
+        <p:spPr>
+          <a:xfrm>
+            <a:off x="457200" y="1280160"/>
+            <a:ext cx="11247120" cy="5303520"/>
+          </a:xfrm>
+          <a:prstGeom prst="rect">
+            <a:avLst/>
+          </a:prstGeom>
+          <a:noFill/>
+        </p:spPr>
+        <p:txBody>
+          <a:bodyPr wrap="square">
+            <a:spAutoFit/>
+          </a:bodyPr>
+          <a:lstStyle/>
+          <a:p>
+            <a:pPr algn="l">
+              <a:spcAft>
+                <a:spcPts val="800"/>
+              </a:spcAft>
+            </a:pPr>
+            <a:r>
+              <a:rPr sz="1800"/>
+              <a:t>A capital-efficient path to a vertical learning platform. Validated revenue intent before any AI cost is spent.</a:t>
+            </a:r>
+          </a:p>
+          <a:p>
+            <a:pPr algn="l">
+              <a:spcAft>
+                <a:spcPts val="800"/>
+              </a:spcAft>
+            </a:pPr>
+            <a:r>
+              <a:rPr sz="1800"/>
+              <a:t>Stage: pre-launch • Operator: solo, hands-on • Built on existing CCA-F study repo</a:t>
+            </a:r>
+          </a:p>
+        </p:txBody>
+      </p:sp>
+    </p:spTree>
+  </p:cSld>
+  <p:clrMapOvr>
+    <a:masterClrMapping/>
+  </p:clrMapOvr>
+</p:sld>
+</file>
+
+<file path=ppt/slides/slide20.xml><?xml version="1.0" encoding="utf-8"?>
 <p:sld xmlns:a="http://schemas.openxmlformats.org/drawingml/2006/main" xmlns:p="http://schemas.openxmlformats.org/presentationml/2006/main" xmlns:r="http://schemas.openxmlformats.org/officeDocument/2006/relationships">
   <p:cSld>
     <p:spTree>
@@ -6283,104 +6939,7 @@
 </p:sld>
 </file>
 
-<file path=ppt/slides/slide2.xml><?xml version="1.0" encoding="utf-8"?>
-<p:sld xmlns:a="http://schemas.openxmlformats.org/drawingml/2006/main" xmlns:p="http://schemas.openxmlformats.org/presentationml/2006/main" xmlns:r="http://schemas.openxmlformats.org/officeDocument/2006/relationships">
-  <p:cSld>
-    <p:spTree>
-      <p:nvGrpSpPr>
-        <p:cNvPr id="1" name=""/>
-        <p:cNvGrpSpPr/>
-        <p:nvPr/>
-      </p:nvGrpSpPr>
-      <p:grpSpPr/>
-      <p:sp>
-        <p:nvSpPr>
-          <p:cNvPr id="2" name="TextBox 1"/>
-          <p:cNvSpPr txBox="1"/>
-          <p:nvPr/>
-        </p:nvSpPr>
-        <p:spPr>
-          <a:xfrm>
-            <a:off x="457200" y="274320"/>
-            <a:ext cx="11247120" cy="914400"/>
-          </a:xfrm>
-          <a:prstGeom prst="rect">
-            <a:avLst/>
-          </a:prstGeom>
-          <a:noFill/>
-        </p:spPr>
-        <p:txBody>
-          <a:bodyPr wrap="square">
-            <a:spAutoFit/>
-          </a:bodyPr>
-          <a:lstStyle/>
-          <a:p>
-            <a:pPr algn="l"/>
-            <a:r>
-              <a:rPr sz="2800" b="1">
-                <a:solidFill>
-                  <a:srgbClr val="1A1A2E"/>
-                </a:solidFill>
-              </a:rPr>
-              <a:t>Content Pack Management Platform</a:t>
-            </a:r>
-          </a:p>
-        </p:txBody>
-      </p:sp>
-      <p:sp>
-        <p:nvSpPr>
-          <p:cNvPr id="3" name="TextBox 2"/>
-          <p:cNvSpPr txBox="1"/>
-          <p:nvPr/>
-        </p:nvSpPr>
-        <p:spPr>
-          <a:xfrm>
-            <a:off x="457200" y="1280160"/>
-            <a:ext cx="11247120" cy="5303520"/>
-          </a:xfrm>
-          <a:prstGeom prst="rect">
-            <a:avLst/>
-          </a:prstGeom>
-          <a:noFill/>
-        </p:spPr>
-        <p:txBody>
-          <a:bodyPr wrap="square">
-            <a:spAutoFit/>
-          </a:bodyPr>
-          <a:lstStyle/>
-          <a:p>
-            <a:pPr algn="l">
-              <a:spcAft>
-                <a:spcPts val="800"/>
-              </a:spcAft>
-            </a:pPr>
-            <a:r>
-              <a:rPr sz="1800"/>
-              <a:t>A capital-efficient path to a vertical learning platform. Validated revenue intent before any AI cost is spent.</a:t>
-            </a:r>
-          </a:p>
-          <a:p>
-            <a:pPr algn="l">
-              <a:spcAft>
-                <a:spcPts val="800"/>
-              </a:spcAft>
-            </a:pPr>
-            <a:r>
-              <a:rPr sz="1800"/>
-              <a:t>Stage: pre-launch • Operator: solo, hands-on • Built on existing CCA-F study repo</a:t>
-            </a:r>
-          </a:p>
-        </p:txBody>
-      </p:sp>
-    </p:spTree>
-  </p:cSld>
-  <p:clrMapOvr>
-    <a:masterClrMapping/>
-  </p:clrMapOvr>
-</p:sld>
-</file>
-
-<file path=ppt/slides/slide20.xml><?xml version="1.0" encoding="utf-8"?>
+<file path=ppt/slides/slide21.xml><?xml version="1.0" encoding="utf-8"?>
 <p:sld xmlns:a="http://schemas.openxmlformats.org/drawingml/2006/main" xmlns:p="http://schemas.openxmlformats.org/presentationml/2006/main" xmlns:r="http://schemas.openxmlformats.org/officeDocument/2006/relationships">
   <p:cSld>
     <p:spTree>
@@ -6694,7 +7253,7 @@
 </p:sld>
 </file>
 
-<file path=ppt/slides/slide21.xml><?xml version="1.0" encoding="utf-8"?>
+<file path=ppt/slides/slide22.xml><?xml version="1.0" encoding="utf-8"?>
 <p:sld xmlns:a="http://schemas.openxmlformats.org/drawingml/2006/main" xmlns:p="http://schemas.openxmlformats.org/presentationml/2006/main" xmlns:r="http://schemas.openxmlformats.org/officeDocument/2006/relationships">
   <p:cSld>
     <p:spTree>
@@ -6823,7 +7382,7 @@
 </p:sld>
 </file>
 
-<file path=ppt/slides/slide22.xml><?xml version="1.0" encoding="utf-8"?>
+<file path=ppt/slides/slide23.xml><?xml version="1.0" encoding="utf-8"?>
 <p:sld xmlns:a="http://schemas.openxmlformats.org/drawingml/2006/main" xmlns:p="http://schemas.openxmlformats.org/presentationml/2006/main" xmlns:r="http://schemas.openxmlformats.org/officeDocument/2006/relationships">
   <p:cSld>
     <p:spTree>
@@ -6913,7 +7472,7 @@
 </p:sld>
 </file>
 
-<file path=ppt/slides/slide23.xml><?xml version="1.0" encoding="utf-8"?>
+<file path=ppt/slides/slide24.xml><?xml version="1.0" encoding="utf-8"?>
 <p:sld xmlns:a="http://schemas.openxmlformats.org/drawingml/2006/main" xmlns:p="http://schemas.openxmlformats.org/presentationml/2006/main" xmlns:r="http://schemas.openxmlformats.org/officeDocument/2006/relationships">
   <p:cSld>
     <p:spTree>

--- a/plans/deck-investor.pptx
+++ b/plans/deck-investor.pptx
@@ -5648,7 +5648,7 @@
             </a:pPr>
             <a:r>
               <a:rPr sz="1800"/>
-              <a:t>The moat is the matrix. Anyone can build an AI tutor. The defensibility is the named-mechanism → shipped-feature → falsifiable-metric chain — and the willingness to be measured against L1–L4 Kirkpatrick targets in §D4 of the build plan.</a:t>
+              <a:t>The moat is the matrix. Anyone can build an AI tutor. The defensibility is the named-mechanism → shipped-feature → falsifiable-metric chain — and the willingness to be measured against L1–L4 Kirkpatrick targets in §D4 of the build plan. Full diligence dossier in research-and-strategy-dossier.md — TAM/SAM/SOM, named industry comparables (Duolingo, Coursera, Maven, Section, Cornerstone, Docebo), pricing tiers, unit economics, NRR targets (Y1 ≥ 110%, Y2 ≥ 120% per SaaS Capital 2025), and capital- efficiency case.</a:t>
             </a:r>
           </a:p>
         </p:txBody>
